--- a/evaluation/dashboard/public/decks/uxl-onedpl-maintainer-briefing.pptx
+++ b/evaluation/dashboard/public/decks/uxl-onedpl-maintainer-briefing.pptx
@@ -2,20 +2,19 @@
 <file path=ppt/presentation.xml><?xml version="1.0" encoding="utf-8"?>
 <p:presentation xmlns:p="http://schemas.openxmlformats.org/presentationml/2006/main">
   <p:sldMasterIdLst>
-    <p:sldMasterId xmlns:r="http://schemas.openxmlformats.org/officeDocument/2006/relationships" id="2147483648" r:id="R79a86e9db6c14afa"/>
-    <p:sldMasterId xmlns:r="http://schemas.openxmlformats.org/officeDocument/2006/relationships" id="2147483665" r:id="R51d787236c15492f"/>
+    <p:sldMasterId xmlns:r="http://schemas.openxmlformats.org/officeDocument/2006/relationships" id="2147483648" r:id="R0a3e4585fd844b17"/>
+    <p:sldMasterId xmlns:r="http://schemas.openxmlformats.org/officeDocument/2006/relationships" id="2147483665" r:id="R37e9b1a517654061"/>
   </p:sldMasterIdLst>
   <p:notesMasterIdLst>
-    <p:notesMasterId xmlns:r="http://schemas.openxmlformats.org/officeDocument/2006/relationships" r:id="Rb3fb3167e43d4ffe"/>
+    <p:notesMasterId xmlns:r="http://schemas.openxmlformats.org/officeDocument/2006/relationships" r:id="Red22d16f78224b22"/>
   </p:notesMasterIdLst>
   <p:sldIdLst>
-    <p:sldId xmlns:r="http://schemas.openxmlformats.org/officeDocument/2006/relationships" id="256" r:id="R0e7af1093b2d4481"/>
-    <p:sldId xmlns:r="http://schemas.openxmlformats.org/officeDocument/2006/relationships" id="257" r:id="Rc19a6878f3fa4230"/>
-    <p:sldId xmlns:r="http://schemas.openxmlformats.org/officeDocument/2006/relationships" id="258" r:id="R786ac9050b3a4a78"/>
-    <p:sldId xmlns:r="http://schemas.openxmlformats.org/officeDocument/2006/relationships" id="259" r:id="R3a8b87f3c64e487e"/>
-    <p:sldId xmlns:r="http://schemas.openxmlformats.org/officeDocument/2006/relationships" id="260" r:id="R661ac39f75cf47b0"/>
-    <p:sldId xmlns:r="http://schemas.openxmlformats.org/officeDocument/2006/relationships" id="261" r:id="Rcf61d7f622994778"/>
-    <p:sldId xmlns:r="http://schemas.openxmlformats.org/officeDocument/2006/relationships" id="262" r:id="R604b0c2a37f344ac"/>
+    <p:sldId xmlns:r="http://schemas.openxmlformats.org/officeDocument/2006/relationships" id="256" r:id="R475920009c11471a"/>
+    <p:sldId xmlns:r="http://schemas.openxmlformats.org/officeDocument/2006/relationships" id="257" r:id="Ra90483d593a94449"/>
+    <p:sldId xmlns:r="http://schemas.openxmlformats.org/officeDocument/2006/relationships" id="258" r:id="Rbe29e17ce0f44dde"/>
+    <p:sldId xmlns:r="http://schemas.openxmlformats.org/officeDocument/2006/relationships" id="259" r:id="R740751b60d9f4083"/>
+    <p:sldId xmlns:r="http://schemas.openxmlformats.org/officeDocument/2006/relationships" id="260" r:id="R59e2c328d2e54c20"/>
+    <p:sldId xmlns:r="http://schemas.openxmlformats.org/officeDocument/2006/relationships" id="261" r:id="R3d36d1a1594e4ebe"/>
   </p:sldIdLst>
   <p:sldSz cx="12192000" cy="6858000"/>
   <p:notesSz cx="6858000" cy="9144000"/>
@@ -609,7 +608,7 @@
           </a:p>
           <a:p xmlns:a="http://schemas.openxmlformats.org/drawingml/2006/main">
             <a:r>
-              <a:t>Speaker cue: Why this is useful to oneDPL at first glance</a:t>
+              <a:t>Speaker cue: What the skill tells an agent today</a:t>
             </a:r>
           </a:p>
         </p:txBody>
@@ -709,7 +708,7 @@
           </a:p>
           <a:p xmlns:a="http://schemas.openxmlformats.org/drawingml/2006/main">
             <a:r>
-              <a:t>Speaker cue: What the skill tells an agent today</a:t>
+              <a:t>Speaker cue: Evaluation inventory: 4 implemented, 2 device gaps</a:t>
             </a:r>
           </a:p>
         </p:txBody>
@@ -809,7 +808,7 @@
           </a:p>
           <a:p xmlns:a="http://schemas.openxmlformats.org/drawingml/2006/main">
             <a:r>
-              <a:t>Speaker cue: Evaluation inventory: 4 implemented, 2 device gaps</a:t>
+              <a:t>Speaker cue: How we chose the content</a:t>
             </a:r>
           </a:p>
         </p:txBody>
@@ -909,7 +908,7 @@
           </a:p>
           <a:p xmlns:a="http://schemas.openxmlformats.org/drawingml/2006/main">
             <a:r>
-              <a:t>Speaker cue: How we chose the content</a:t>
+              <a:t>Speaker cue: What project ownership would look like</a:t>
             </a:r>
           </a:p>
         </p:txBody>
@@ -940,106 +939,6 @@
 </file>
 
 <file path=ppt/notesSlides/notesSlide6.xml><?xml version="1.0" encoding="utf-8"?>
-<p:notes xmlns:p="http://schemas.openxmlformats.org/presentationml/2006/main">
-  <p:cSld>
-    <p:spTree>
-      <p:nvGrpSpPr>
-        <p:cNvPr id="1" name=""/>
-        <p:cNvGrpSpPr/>
-        <p:nvPr/>
-      </p:nvGrpSpPr>
-      <p:grpSpPr>
-        <a:xfrm xmlns:a="http://schemas.openxmlformats.org/drawingml/2006/main"/>
-      </p:grpSpPr>
-      <p:sp>
-        <p:nvSpPr>
-          <p:cNvPr id="2" name="Slide Image Placeholder 1"/>
-          <p:cNvSpPr>
-            <a:spLocks xmlns:a="http://schemas.openxmlformats.org/drawingml/2006/main" noGrp="1"/>
-          </p:cNvSpPr>
-          <p:nvPr>
-            <p:ph type="sldImg" idx="0"/>
-          </p:nvPr>
-        </p:nvSpPr>
-        <p:spPr/>
-      </p:sp>
-      <p:sp>
-        <p:nvSpPr>
-          <p:cNvPr id="3" name="Notes Placeholder 2"/>
-          <p:cNvSpPr>
-            <a:spLocks xmlns:a="http://schemas.openxmlformats.org/drawingml/2006/main" noGrp="1"/>
-          </p:cNvSpPr>
-          <p:nvPr>
-            <p:ph type="body" idx="1"/>
-          </p:nvPr>
-        </p:nvSpPr>
-        <p:spPr/>
-        <p:txBody>
-          <a:bodyPr xmlns:a="http://schemas.openxmlformats.org/drawingml/2006/main"/>
-          <a:lstStyle xmlns:a="http://schemas.openxmlformats.org/drawingml/2006/main"/>
-          <a:p xmlns:a="http://schemas.openxmlformats.org/drawingml/2006/main">
-            <a:r>
-              <a:t>[Sources]</a:t>
-            </a:r>
-          </a:p>
-          <a:p xmlns:a="http://schemas.openxmlformats.org/drawingml/2006/main">
-            <a:r>
-              <a:t>- https://github.com/uxlfoundation/skills/tree/main/skills/uxl-onedpl</a:t>
-            </a:r>
-          </a:p>
-          <a:p xmlns:a="http://schemas.openxmlformats.org/drawingml/2006/main">
-            <a:r>
-              <a:t>- https://github.com/uxlfoundation/skills/blob/main/skill-cards/uxl-onedpl.md</a:t>
-            </a:r>
-          </a:p>
-          <a:p xmlns:a="http://schemas.openxmlformats.org/drawingml/2006/main">
-            <a:r>
-              <a:t>- https://github.com/uxlfoundation/skills/blob/main/evaluation/harbor/suites.json</a:t>
-            </a:r>
-          </a:p>
-          <a:p xmlns:a="http://schemas.openxmlformats.org/drawingml/2006/main">
-            <a:r>
-              <a:t>[/Sources]</a:t>
-            </a:r>
-          </a:p>
-          <a:p xmlns:a="http://schemas.openxmlformats.org/drawingml/2006/main">
-            <a:r>
-              <a:t/>
-            </a:r>
-          </a:p>
-          <a:p xmlns:a="http://schemas.openxmlformats.org/drawingml/2006/main">
-            <a:r>
-              <a:t>Speaker cue: What project ownership would look like</a:t>
-            </a:r>
-          </a:p>
-        </p:txBody>
-      </p:sp>
-      <p:sp>
-        <p:nvSpPr>
-          <p:cNvPr id="4" name="Slide Number Placeholder 3"/>
-          <p:cNvSpPr>
-            <a:spLocks xmlns:a="http://schemas.openxmlformats.org/drawingml/2006/main" noGrp="1"/>
-          </p:cNvSpPr>
-          <p:nvPr>
-            <p:ph type="sldNum" idx="5"/>
-          </p:nvPr>
-        </p:nvSpPr>
-        <p:spPr/>
-        <p:txBody>
-          <a:bodyPr xmlns:a="http://schemas.openxmlformats.org/drawingml/2006/main"/>
-          <a:lstStyle xmlns:a="http://schemas.openxmlformats.org/drawingml/2006/main"/>
-          <a:p xmlns:a="http://schemas.openxmlformats.org/drawingml/2006/main"/>
-        </p:txBody>
-      </p:sp>
-    </p:spTree>
-  </p:cSld>
-  <p:clrMapOvr>
-    <a:masterClrMapping xmlns:a="http://schemas.openxmlformats.org/drawingml/2006/main"/>
-  </p:clrMapOvr>
-</p:notes>
-</file>
-
-<file path=ppt/notesSlides/notesSlide7.xml><?xml version="1.0" encoding="utf-8"?>
 <p:notes xmlns:p="http://schemas.openxmlformats.org/presentationml/2006/main">
   <p:cSld>
     <p:spTree>
@@ -1145,7 +1044,7 @@
     <p:bg>
       <p:bgPr>
         <a:blipFill xmlns:a="http://schemas.openxmlformats.org/drawingml/2006/main">
-          <a:blip xmlns:r="http://schemas.openxmlformats.org/officeDocument/2006/relationships" r:embed="R47c42a12484c4ae8">
+          <a:blip xmlns:r="http://schemas.openxmlformats.org/officeDocument/2006/relationships" r:embed="R8e0a059ca86e439f">
             <a:alphaModFix/>
           </a:blip>
           <a:stretch>
@@ -1580,7 +1479,7 @@
           <p:nvPr/>
         </p:nvPicPr>
         <p:blipFill rotWithShape="1">
-          <a:blip xmlns:r="http://schemas.openxmlformats.org/officeDocument/2006/relationships" xmlns:a="http://schemas.openxmlformats.org/drawingml/2006/main" r:embed="Re31dee4e33274069">
+          <a:blip xmlns:r="http://schemas.openxmlformats.org/officeDocument/2006/relationships" xmlns:a="http://schemas.openxmlformats.org/drawingml/2006/main" r:embed="Re37277eba2564d15">
             <a:alphaModFix/>
           </a:blip>
           <a:srcRect xmlns:a="http://schemas.openxmlformats.org/drawingml/2006/main" l="0" t="0" r="0" b="0"/>
@@ -1610,7 +1509,7 @@
     <p:bg>
       <p:bgPr>
         <a:blipFill xmlns:a="http://schemas.openxmlformats.org/drawingml/2006/main">
-          <a:blip xmlns:r="http://schemas.openxmlformats.org/officeDocument/2006/relationships" r:embed="R35f6fd8e6d49402d">
+          <a:blip xmlns:r="http://schemas.openxmlformats.org/officeDocument/2006/relationships" r:embed="R2496b3061bdf4f74">
             <a:alphaModFix/>
           </a:blip>
           <a:stretch>
@@ -2644,7 +2543,7 @@
           <p:nvPr/>
         </p:nvPicPr>
         <p:blipFill rotWithShape="1">
-          <a:blip xmlns:r="http://schemas.openxmlformats.org/officeDocument/2006/relationships" xmlns:a="http://schemas.openxmlformats.org/drawingml/2006/main" r:embed="Rb246ef94154f4046">
+          <a:blip xmlns:r="http://schemas.openxmlformats.org/officeDocument/2006/relationships" xmlns:a="http://schemas.openxmlformats.org/drawingml/2006/main" r:embed="Ra4359fa8e46d4f97">
             <a:alphaModFix/>
           </a:blip>
           <a:srcRect xmlns:a="http://schemas.openxmlformats.org/drawingml/2006/main" l="0" t="0" r="0" b="0"/>
@@ -3668,7 +3567,7 @@
           <p:nvPr/>
         </p:nvPicPr>
         <p:blipFill rotWithShape="1">
-          <a:blip xmlns:r="http://schemas.openxmlformats.org/officeDocument/2006/relationships" xmlns:a="http://schemas.openxmlformats.org/drawingml/2006/main" r:embed="Rf9a958437558485b">
+          <a:blip xmlns:r="http://schemas.openxmlformats.org/officeDocument/2006/relationships" xmlns:a="http://schemas.openxmlformats.org/drawingml/2006/main" r:embed="Rb4b7cce20a094904">
             <a:alphaModFix/>
           </a:blip>
           <a:srcRect xmlns:a="http://schemas.openxmlformats.org/drawingml/2006/main" l="0" t="0" r="0" b="0"/>
@@ -3698,7 +3597,7 @@
     <p:bg>
       <p:bgPr>
         <a:blipFill xmlns:a="http://schemas.openxmlformats.org/drawingml/2006/main">
-          <a:blip xmlns:r="http://schemas.openxmlformats.org/officeDocument/2006/relationships" r:embed="R734cff5f8d16478f">
+          <a:blip xmlns:r="http://schemas.openxmlformats.org/officeDocument/2006/relationships" r:embed="R3f40666c57b9491e">
             <a:alphaModFix/>
           </a:blip>
           <a:stretch>
@@ -4972,7 +4871,7 @@
           <p:nvPr/>
         </p:nvPicPr>
         <p:blipFill rotWithShape="1">
-          <a:blip xmlns:r="http://schemas.openxmlformats.org/officeDocument/2006/relationships" xmlns:a="http://schemas.openxmlformats.org/drawingml/2006/main" r:embed="Rfbcc22b1d104476f">
+          <a:blip xmlns:r="http://schemas.openxmlformats.org/officeDocument/2006/relationships" xmlns:a="http://schemas.openxmlformats.org/drawingml/2006/main" r:embed="R0ab6817d06e347b3">
             <a:alphaModFix/>
           </a:blip>
           <a:srcRect xmlns:a="http://schemas.openxmlformats.org/drawingml/2006/main" l="0" t="0" r="0" b="0"/>
@@ -8216,7 +8115,7 @@
           <p:nvPr/>
         </p:nvPicPr>
         <p:blipFill rotWithShape="1">
-          <a:blip xmlns:r="http://schemas.openxmlformats.org/officeDocument/2006/relationships" xmlns:a="http://schemas.openxmlformats.org/drawingml/2006/main" r:embed="R42cfbead9b1c4a18">
+          <a:blip xmlns:r="http://schemas.openxmlformats.org/officeDocument/2006/relationships" xmlns:a="http://schemas.openxmlformats.org/drawingml/2006/main" r:embed="Re3742e0d85b54b4f">
             <a:alphaModFix/>
           </a:blip>
           <a:srcRect xmlns:a="http://schemas.openxmlformats.org/drawingml/2006/main" l="0" t="0" r="0" b="0"/>
@@ -9954,7 +9853,7 @@
           <p:nvPr/>
         </p:nvPicPr>
         <p:blipFill rotWithShape="1">
-          <a:blip xmlns:r="http://schemas.openxmlformats.org/officeDocument/2006/relationships" xmlns:a="http://schemas.openxmlformats.org/drawingml/2006/main" r:embed="Re5c13fa3783f47d4">
+          <a:blip xmlns:r="http://schemas.openxmlformats.org/officeDocument/2006/relationships" xmlns:a="http://schemas.openxmlformats.org/drawingml/2006/main" r:embed="R0f19e336e44d4181">
             <a:alphaModFix/>
           </a:blip>
           <a:srcRect xmlns:a="http://schemas.openxmlformats.org/drawingml/2006/main" l="0" t="0" r="0" b="0"/>
@@ -16783,7 +16682,7 @@
     <p:bg>
       <p:bgPr>
         <a:blipFill xmlns:a="http://schemas.openxmlformats.org/drawingml/2006/main">
-          <a:blip xmlns:r="http://schemas.openxmlformats.org/officeDocument/2006/relationships" r:embed="Rbb13659dc7854db9">
+          <a:blip xmlns:r="http://schemas.openxmlformats.org/officeDocument/2006/relationships" r:embed="R8236ec10af354758">
             <a:alphaModFix/>
           </a:blip>
           <a:stretch>
@@ -17218,7 +17117,7 @@
           <p:nvPr/>
         </p:nvPicPr>
         <p:blipFill rotWithShape="1">
-          <a:blip xmlns:r="http://schemas.openxmlformats.org/officeDocument/2006/relationships" xmlns:a="http://schemas.openxmlformats.org/drawingml/2006/main" r:embed="Rcb8f44ca4f674aba">
+          <a:blip xmlns:r="http://schemas.openxmlformats.org/officeDocument/2006/relationships" xmlns:a="http://schemas.openxmlformats.org/drawingml/2006/main" r:embed="Rb9abe82d342643ba">
             <a:alphaModFix/>
           </a:blip>
           <a:srcRect xmlns:a="http://schemas.openxmlformats.org/drawingml/2006/main" l="0" t="0" r="0" b="0"/>
@@ -17248,7 +17147,7 @@
     <p:bg>
       <p:bgPr>
         <a:blipFill xmlns:a="http://schemas.openxmlformats.org/drawingml/2006/main">
-          <a:blip xmlns:r="http://schemas.openxmlformats.org/officeDocument/2006/relationships" r:embed="R0410a74c197e4f92">
+          <a:blip xmlns:r="http://schemas.openxmlformats.org/officeDocument/2006/relationships" r:embed="R021c2426968648cc">
             <a:alphaModFix/>
           </a:blip>
           <a:stretch>
@@ -17881,7 +17780,7 @@
           <p:nvPr/>
         </p:nvPicPr>
         <p:blipFill rotWithShape="1">
-          <a:blip xmlns:r="http://schemas.openxmlformats.org/officeDocument/2006/relationships" xmlns:a="http://schemas.openxmlformats.org/drawingml/2006/main" r:embed="Rdfed4f6e57ce4d28">
+          <a:blip xmlns:r="http://schemas.openxmlformats.org/officeDocument/2006/relationships" xmlns:a="http://schemas.openxmlformats.org/drawingml/2006/main" r:embed="Rcd33ee80c36d43e5">
             <a:alphaModFix/>
           </a:blip>
           <a:srcRect xmlns:a="http://schemas.openxmlformats.org/drawingml/2006/main" l="0" t="0" r="0" b="0"/>
@@ -18341,7 +18240,7 @@
     <p:bg>
       <p:bgPr>
         <a:blipFill xmlns:a="http://schemas.openxmlformats.org/drawingml/2006/main">
-          <a:blip xmlns:r="http://schemas.openxmlformats.org/officeDocument/2006/relationships" r:embed="R24b6dba2f74d4a63">
+          <a:blip xmlns:r="http://schemas.openxmlformats.org/officeDocument/2006/relationships" r:embed="R7949a7e3e1734696">
             <a:alphaModFix/>
           </a:blip>
           <a:stretch>
@@ -18974,7 +18873,7 @@
           <p:nvPr/>
         </p:nvPicPr>
         <p:blipFill rotWithShape="1">
-          <a:blip xmlns:r="http://schemas.openxmlformats.org/officeDocument/2006/relationships" xmlns:a="http://schemas.openxmlformats.org/drawingml/2006/main" r:embed="Ra29d41c00c04420a">
+          <a:blip xmlns:r="http://schemas.openxmlformats.org/officeDocument/2006/relationships" xmlns:a="http://schemas.openxmlformats.org/drawingml/2006/main" r:embed="R47c2463b01e14fbe">
             <a:alphaModFix/>
           </a:blip>
           <a:srcRect xmlns:a="http://schemas.openxmlformats.org/drawingml/2006/main" l="0" t="0" r="0" b="0"/>
@@ -21630,7 +21529,7 @@
           <p:nvPr/>
         </p:nvPicPr>
         <p:blipFill rotWithShape="1">
-          <a:blip xmlns:r="http://schemas.openxmlformats.org/officeDocument/2006/relationships" xmlns:a="http://schemas.openxmlformats.org/drawingml/2006/main" r:embed="R5ea2f775bef34390">
+          <a:blip xmlns:r="http://schemas.openxmlformats.org/officeDocument/2006/relationships" xmlns:a="http://schemas.openxmlformats.org/drawingml/2006/main" r:embed="R341f5b247b27461d">
             <a:alphaModFix/>
           </a:blip>
           <a:srcRect xmlns:a="http://schemas.openxmlformats.org/drawingml/2006/main" l="0" t="0" r="0" b="0"/>
@@ -21660,7 +21559,7 @@
     <p:bg>
       <p:bgPr>
         <a:blipFill xmlns:a="http://schemas.openxmlformats.org/drawingml/2006/main">
-          <a:blip xmlns:r="http://schemas.openxmlformats.org/officeDocument/2006/relationships" r:embed="R4f3ebe1432844e18">
+          <a:blip xmlns:r="http://schemas.openxmlformats.org/officeDocument/2006/relationships" r:embed="R7ad8f22fe7f445e9">
             <a:alphaModFix/>
           </a:blip>
           <a:stretch>
@@ -22504,7 +22403,7 @@
           <p:nvPr/>
         </p:nvPicPr>
         <p:blipFill rotWithShape="1">
-          <a:blip xmlns:r="http://schemas.openxmlformats.org/officeDocument/2006/relationships" xmlns:a="http://schemas.openxmlformats.org/drawingml/2006/main" r:embed="Re1cce49195504bc5">
+          <a:blip xmlns:r="http://schemas.openxmlformats.org/officeDocument/2006/relationships" xmlns:a="http://schemas.openxmlformats.org/drawingml/2006/main" r:embed="R56ce99032ad54799">
             <a:alphaModFix/>
           </a:blip>
           <a:srcRect xmlns:a="http://schemas.openxmlformats.org/drawingml/2006/main" l="0" t="0" r="0" b="0"/>
@@ -22534,7 +22433,7 @@
     <p:bg>
       <p:bgPr>
         <a:blipFill xmlns:a="http://schemas.openxmlformats.org/drawingml/2006/main">
-          <a:blip xmlns:r="http://schemas.openxmlformats.org/officeDocument/2006/relationships" r:embed="R7ef655dfb959404f">
+          <a:blip xmlns:r="http://schemas.openxmlformats.org/officeDocument/2006/relationships" r:embed="R224e5f437967449f">
             <a:alphaModFix/>
           </a:blip>
           <a:stretch>
@@ -23482,7 +23381,7 @@
           <p:nvPr/>
         </p:nvPicPr>
         <p:blipFill rotWithShape="1">
-          <a:blip xmlns:r="http://schemas.openxmlformats.org/officeDocument/2006/relationships" xmlns:a="http://schemas.openxmlformats.org/drawingml/2006/main" r:embed="Rf591a5031b7c4e7a">
+          <a:blip xmlns:r="http://schemas.openxmlformats.org/officeDocument/2006/relationships" xmlns:a="http://schemas.openxmlformats.org/drawingml/2006/main" r:embed="R2bc50baf7bd04869">
             <a:alphaModFix/>
           </a:blip>
           <a:srcRect xmlns:a="http://schemas.openxmlformats.org/drawingml/2006/main" l="0" t="0" r="0" b="0"/>
@@ -23512,7 +23411,7 @@
     <p:bg>
       <p:bgPr>
         <a:blipFill xmlns:a="http://schemas.openxmlformats.org/drawingml/2006/main">
-          <a:blip xmlns:r="http://schemas.openxmlformats.org/officeDocument/2006/relationships" r:embed="Rf71a6a61aced45b3">
+          <a:blip xmlns:r="http://schemas.openxmlformats.org/officeDocument/2006/relationships" r:embed="R1d9a56dd60054698">
             <a:alphaModFix/>
           </a:blip>
           <a:stretch>
@@ -23973,7 +23872,7 @@
           <p:nvPr/>
         </p:nvPicPr>
         <p:blipFill rotWithShape="1">
-          <a:blip xmlns:r="http://schemas.openxmlformats.org/officeDocument/2006/relationships" xmlns:a="http://schemas.openxmlformats.org/drawingml/2006/main" r:embed="Ra30a59b215f44dd3">
+          <a:blip xmlns:r="http://schemas.openxmlformats.org/officeDocument/2006/relationships" xmlns:a="http://schemas.openxmlformats.org/drawingml/2006/main" r:embed="Rb04a54de7b0c41d6">
             <a:alphaModFix/>
           </a:blip>
           <a:srcRect xmlns:a="http://schemas.openxmlformats.org/drawingml/2006/main" l="0" t="0" r="0" b="0"/>
@@ -25685,22 +25584,22 @@
   </p:cSld>
   <p:clrMap bg1="lt1" tx1="dk1" bg2="dk2" tx2="lt2" accent1="accent1" accent2="accent2" accent3="accent3" accent4="accent4" accent5="accent5" accent6="accent6" hlink="hlink" folHlink="folHlink"/>
   <p:sldLayoutIdLst>
-    <p:sldLayoutId xmlns:r="http://schemas.openxmlformats.org/officeDocument/2006/relationships" id="2147483649" r:id="Rfc654ed42b314c58"/>
-    <p:sldLayoutId xmlns:r="http://schemas.openxmlformats.org/officeDocument/2006/relationships" id="2147483650" r:id="R90a9c42ce1c64417"/>
-    <p:sldLayoutId xmlns:r="http://schemas.openxmlformats.org/officeDocument/2006/relationships" id="2147483651" r:id="R9968ef58b0994eb3"/>
-    <p:sldLayoutId xmlns:r="http://schemas.openxmlformats.org/officeDocument/2006/relationships" id="2147483652" r:id="R1caddf0dd64d45f0"/>
-    <p:sldLayoutId xmlns:r="http://schemas.openxmlformats.org/officeDocument/2006/relationships" id="2147483653" r:id="Rfafb4bf160a14aed"/>
-    <p:sldLayoutId xmlns:r="http://schemas.openxmlformats.org/officeDocument/2006/relationships" id="2147483654" r:id="R765c9dd779c74f7e"/>
-    <p:sldLayoutId xmlns:r="http://schemas.openxmlformats.org/officeDocument/2006/relationships" id="2147483655" r:id="R99d0f9e4c8a74fc6"/>
-    <p:sldLayoutId xmlns:r="http://schemas.openxmlformats.org/officeDocument/2006/relationships" id="2147483656" r:id="Rf08feaf898254338"/>
-    <p:sldLayoutId xmlns:r="http://schemas.openxmlformats.org/officeDocument/2006/relationships" id="2147483657" r:id="R19d274c239fa474d"/>
-    <p:sldLayoutId xmlns:r="http://schemas.openxmlformats.org/officeDocument/2006/relationships" id="2147483658" r:id="R0fa7cc0bd1c24df7"/>
-    <p:sldLayoutId xmlns:r="http://schemas.openxmlformats.org/officeDocument/2006/relationships" id="2147483659" r:id="Rc8b1462624f04a57"/>
-    <p:sldLayoutId xmlns:r="http://schemas.openxmlformats.org/officeDocument/2006/relationships" id="2147483660" r:id="R6bb6ae409cfb4d6d"/>
-    <p:sldLayoutId xmlns:r="http://schemas.openxmlformats.org/officeDocument/2006/relationships" id="2147483661" r:id="R0521bbf5a494422a"/>
-    <p:sldLayoutId xmlns:r="http://schemas.openxmlformats.org/officeDocument/2006/relationships" id="2147483662" r:id="R21d52cfcd6ea4325"/>
-    <p:sldLayoutId xmlns:r="http://schemas.openxmlformats.org/officeDocument/2006/relationships" id="2147483663" r:id="Rb3f4faf28d3e4afe"/>
-    <p:sldLayoutId xmlns:r="http://schemas.openxmlformats.org/officeDocument/2006/relationships" id="2147483664" r:id="R7742a7704c444a8c"/>
+    <p:sldLayoutId xmlns:r="http://schemas.openxmlformats.org/officeDocument/2006/relationships" id="2147483649" r:id="Rcf3f09037f724694"/>
+    <p:sldLayoutId xmlns:r="http://schemas.openxmlformats.org/officeDocument/2006/relationships" id="2147483650" r:id="Ra42d4783bf5547d4"/>
+    <p:sldLayoutId xmlns:r="http://schemas.openxmlformats.org/officeDocument/2006/relationships" id="2147483651" r:id="R452e38ab58d14a4b"/>
+    <p:sldLayoutId xmlns:r="http://schemas.openxmlformats.org/officeDocument/2006/relationships" id="2147483652" r:id="R2e80c968d3834edb"/>
+    <p:sldLayoutId xmlns:r="http://schemas.openxmlformats.org/officeDocument/2006/relationships" id="2147483653" r:id="R4e15652bffcd4978"/>
+    <p:sldLayoutId xmlns:r="http://schemas.openxmlformats.org/officeDocument/2006/relationships" id="2147483654" r:id="R7b9fa201d31b49a4"/>
+    <p:sldLayoutId xmlns:r="http://schemas.openxmlformats.org/officeDocument/2006/relationships" id="2147483655" r:id="R3fd8a9bec0224171"/>
+    <p:sldLayoutId xmlns:r="http://schemas.openxmlformats.org/officeDocument/2006/relationships" id="2147483656" r:id="R324eb797c1804d21"/>
+    <p:sldLayoutId xmlns:r="http://schemas.openxmlformats.org/officeDocument/2006/relationships" id="2147483657" r:id="Ra205500b78cb40f8"/>
+    <p:sldLayoutId xmlns:r="http://schemas.openxmlformats.org/officeDocument/2006/relationships" id="2147483658" r:id="R2904a269b7d94863"/>
+    <p:sldLayoutId xmlns:r="http://schemas.openxmlformats.org/officeDocument/2006/relationships" id="2147483659" r:id="R834f7ddeea7f4585"/>
+    <p:sldLayoutId xmlns:r="http://schemas.openxmlformats.org/officeDocument/2006/relationships" id="2147483660" r:id="Rf282299320674a6e"/>
+    <p:sldLayoutId xmlns:r="http://schemas.openxmlformats.org/officeDocument/2006/relationships" id="2147483661" r:id="R871844ef77064e9a"/>
+    <p:sldLayoutId xmlns:r="http://schemas.openxmlformats.org/officeDocument/2006/relationships" id="2147483662" r:id="R2ae68062882d4e37"/>
+    <p:sldLayoutId xmlns:r="http://schemas.openxmlformats.org/officeDocument/2006/relationships" id="2147483663" r:id="Rdf391eff61cc476b"/>
+    <p:sldLayoutId xmlns:r="http://schemas.openxmlformats.org/officeDocument/2006/relationships" id="2147483664" r:id="Rbe17a16bd4e4474d"/>
   </p:sldLayoutIdLst>
   <p:hf hdr="0" ftr="0" dt="0"/>
   <p:txStyles>
@@ -27893,7 +27792,7 @@
           <p:nvPr/>
         </p:nvPicPr>
         <p:blipFill rotWithShape="1">
-          <a:blip xmlns:r="http://schemas.openxmlformats.org/officeDocument/2006/relationships" xmlns:a="http://schemas.openxmlformats.org/drawingml/2006/main" r:embed="Rdb24ae1c0b86440f">
+          <a:blip xmlns:r="http://schemas.openxmlformats.org/officeDocument/2006/relationships" xmlns:a="http://schemas.openxmlformats.org/drawingml/2006/main" r:embed="Re29be5fdca4244a3">
             <a:alphaModFix/>
           </a:blip>
           <a:srcRect xmlns:a="http://schemas.openxmlformats.org/drawingml/2006/main" l="0" t="0" r="0" b="0"/>
@@ -27916,19 +27815,19 @@
   </p:cSld>
   <p:clrMap bg1="lt1" tx1="dk1" bg2="dk2" tx2="lt2" accent1="accent1" accent2="accent2" accent3="accent3" accent4="accent4" accent5="accent5" accent6="accent6" hlink="hlink" folHlink="folHlink"/>
   <p:sldLayoutIdLst>
-    <p:sldLayoutId xmlns:r="http://schemas.openxmlformats.org/officeDocument/2006/relationships" id="2147483666" r:id="Rc87f070f0129421c"/>
-    <p:sldLayoutId xmlns:r="http://schemas.openxmlformats.org/officeDocument/2006/relationships" id="2147483667" r:id="Rdb3eb665a31846f0"/>
-    <p:sldLayoutId xmlns:r="http://schemas.openxmlformats.org/officeDocument/2006/relationships" id="2147483668" r:id="R84125b3b37c54581"/>
-    <p:sldLayoutId xmlns:r="http://schemas.openxmlformats.org/officeDocument/2006/relationships" id="2147483669" r:id="R9edc82e495e04e05"/>
-    <p:sldLayoutId xmlns:r="http://schemas.openxmlformats.org/officeDocument/2006/relationships" id="2147483670" r:id="R5ebfd4013127433d"/>
-    <p:sldLayoutId xmlns:r="http://schemas.openxmlformats.org/officeDocument/2006/relationships" id="2147483671" r:id="R45cfecd98eec4761"/>
-    <p:sldLayoutId xmlns:r="http://schemas.openxmlformats.org/officeDocument/2006/relationships" id="2147483672" r:id="R82891c087ba94660"/>
-    <p:sldLayoutId xmlns:r="http://schemas.openxmlformats.org/officeDocument/2006/relationships" id="2147483673" r:id="R87cb8615f1884642"/>
-    <p:sldLayoutId xmlns:r="http://schemas.openxmlformats.org/officeDocument/2006/relationships" id="2147483674" r:id="R4d85a8ff0ca5414d"/>
-    <p:sldLayoutId xmlns:r="http://schemas.openxmlformats.org/officeDocument/2006/relationships" id="2147483675" r:id="Redb40eaa2da94123"/>
-    <p:sldLayoutId xmlns:r="http://schemas.openxmlformats.org/officeDocument/2006/relationships" id="2147483676" r:id="R25965563803a4be1"/>
-    <p:sldLayoutId xmlns:r="http://schemas.openxmlformats.org/officeDocument/2006/relationships" id="2147483677" r:id="R355ec9e720194959"/>
-    <p:sldLayoutId xmlns:r="http://schemas.openxmlformats.org/officeDocument/2006/relationships" id="2147483678" r:id="R5e068ec171664d92"/>
+    <p:sldLayoutId xmlns:r="http://schemas.openxmlformats.org/officeDocument/2006/relationships" id="2147483666" r:id="R60800709af9642ed"/>
+    <p:sldLayoutId xmlns:r="http://schemas.openxmlformats.org/officeDocument/2006/relationships" id="2147483667" r:id="Ra099b2701c1d4b18"/>
+    <p:sldLayoutId xmlns:r="http://schemas.openxmlformats.org/officeDocument/2006/relationships" id="2147483668" r:id="Rceda550d5f484367"/>
+    <p:sldLayoutId xmlns:r="http://schemas.openxmlformats.org/officeDocument/2006/relationships" id="2147483669" r:id="R9ad3660a23934564"/>
+    <p:sldLayoutId xmlns:r="http://schemas.openxmlformats.org/officeDocument/2006/relationships" id="2147483670" r:id="Re8ed57a620b84de5"/>
+    <p:sldLayoutId xmlns:r="http://schemas.openxmlformats.org/officeDocument/2006/relationships" id="2147483671" r:id="Rc849f8bb85ff4be1"/>
+    <p:sldLayoutId xmlns:r="http://schemas.openxmlformats.org/officeDocument/2006/relationships" id="2147483672" r:id="R48db7e87e5ad4020"/>
+    <p:sldLayoutId xmlns:r="http://schemas.openxmlformats.org/officeDocument/2006/relationships" id="2147483673" r:id="R40ad11aa2b1a4b82"/>
+    <p:sldLayoutId xmlns:r="http://schemas.openxmlformats.org/officeDocument/2006/relationships" id="2147483674" r:id="Rf891684204644031"/>
+    <p:sldLayoutId xmlns:r="http://schemas.openxmlformats.org/officeDocument/2006/relationships" id="2147483675" r:id="R32daf742e8de4dbc"/>
+    <p:sldLayoutId xmlns:r="http://schemas.openxmlformats.org/officeDocument/2006/relationships" id="2147483676" r:id="R60337ee202324e4e"/>
+    <p:sldLayoutId xmlns:r="http://schemas.openxmlformats.org/officeDocument/2006/relationships" id="2147483677" r:id="R92ddc615cf4a4f5c"/>
+    <p:sldLayoutId xmlns:r="http://schemas.openxmlformats.org/officeDocument/2006/relationships" id="2147483678" r:id="R53396600e9f64521"/>
   </p:sldLayoutIdLst>
   <p:hf hdr="0" ftr="0" dt="0"/>
   <p:txStyles>
@@ -29333,7 +29232,7 @@
           <a:lstStyle xmlns:a="http://schemas.openxmlformats.org/drawingml/2006/main"/>
           <a:p xmlns:a="http://schemas.openxmlformats.org/drawingml/2006/main">
             <a:r>
-              <a:t>Why this is useful to oneDPL at first glance</a:t>
+              <a:t>What the skill tells an agent today</a:t>
             </a:r>
           </a:p>
         </p:txBody>
@@ -29383,7 +29282,7 @@
                   <a:srgbClr val="000000"/>
                 </a:solidFill>
               </a:rPr>
-              <a:t> Choose host versus device on purpose</a:t>
+              <a:t> Start from a serial reference</a:t>
             </a:r>
             <a:r>
               <a:rPr sz="1913">
@@ -29391,7 +29290,7 @@
                   <a:srgbClr val="000000"/>
                 </a:solidFill>
               </a:rPr>
-              <a:t> — Execution policy follows data location, queue ownership, and workload — not an assumption that GPU is always faster.</a:t>
+              <a:t> — Preserve std behavior before changing policy or data placement.</a:t>
             </a:r>
           </a:p>
           <a:p xmlns:a="http://schemas.openxmlformats.org/drawingml/2006/main">
@@ -29412,7 +29311,7 @@
                   <a:srgbClr val="000000"/>
                 </a:solidFill>
               </a:rPr>
-              <a:t> Preserve the standard algorithm contract</a:t>
+              <a:t> Describe data and iterators</a:t>
             </a:r>
             <a:r>
               <a:rPr sz="1913">
@@ -29420,7 +29319,7 @@
                   <a:srgbClr val="000000"/>
                 </a:solidFill>
               </a:rPr>
-              <a:t> — Stability, ordering, iterator requirements, and exception expectations stay visible.</a:t>
+              <a:t> — Host memory, USM, buffers, wrapper types, iterator category, lifetime, and ordering.</a:t>
             </a:r>
           </a:p>
           <a:p xmlns:a="http://schemas.openxmlformats.org/drawingml/2006/main">
@@ -29441,7 +29340,7 @@
                   <a:srgbClr val="000000"/>
                 </a:solidFill>
               </a:rPr>
-              <a:t> Catch asynchronous lifetime bugs</a:t>
+              <a:t> Use caller-owned queues</a:t>
             </a:r>
             <a:r>
               <a:rPr sz="1913">
@@ -29449,7 +29348,7 @@
                   <a:srgbClr val="000000"/>
                 </a:solidFill>
               </a:rPr>
-              <a:t> — Agents must synchronize before host reads and keep USM/buffer ownership valid.</a:t>
+              <a:t> — Construct device policies from the application’s queue when selection and dependencies already exist.</a:t>
             </a:r>
           </a:p>
           <a:p xmlns:a="http://schemas.openxmlformats.org/drawingml/2006/main">
@@ -29470,7 +29369,7 @@
                   <a:srgbClr val="000000"/>
                 </a:solidFill>
               </a:rPr>
-              <a:t> Make portability claims honest</a:t>
+              <a:t> Synchronize explicitly</a:t>
             </a:r>
             <a:r>
               <a:rPr sz="1913">
@@ -29478,7 +29377,36 @@
                   <a:srgbClr val="000000"/>
                 </a:solidFill>
               </a:rPr>
-              <a:t> — Algorithm/device/backend support is checked against current project sources.</a:t>
+              <a:t> — Device completion must be proven before results are consumed on the host.</a:t>
+            </a:r>
+          </a:p>
+          <a:p xmlns:a="http://schemas.openxmlformats.org/drawingml/2006/main">
+            <a:pPr marL="30" indent="-18">
+              <a:spcAft>
+                <a:spcPts val="10"/>
+              </a:spcAft>
+              <a:buChar char="•"/>
+              <a:defRPr sz="1913">
+                <a:solidFill>
+                  <a:srgbClr val="000000"/>
+                </a:solidFill>
+              </a:defRPr>
+            </a:pPr>
+            <a:r>
+              <a:rPr sz="1913" b="1">
+                <a:solidFill>
+                  <a:srgbClr val="000000"/>
+                </a:solidFill>
+              </a:rPr>
+              <a:t> Benchmark end to end</a:t>
+            </a:r>
+            <a:r>
+              <a:rPr sz="1913">
+                <a:solidFill>
+                  <a:srgbClr val="000000"/>
+                </a:solidFill>
+              </a:rPr>
+              <a:t> — Include transfers, queue synchronization, launch cost, and representative ranges.</a:t>
             </a:r>
           </a:p>
         </p:txBody>
@@ -29570,7 +29498,7 @@
           <a:lstStyle xmlns:a="http://schemas.openxmlformats.org/drawingml/2006/main"/>
           <a:p xmlns:a="http://schemas.openxmlformats.org/drawingml/2006/main">
             <a:r>
-              <a:t>What the skill tells an agent today</a:t>
+              <a:t>Evaluation inventory: 4 implemented, 2 device gaps</a:t>
             </a:r>
           </a:p>
         </p:txBody>
@@ -29620,7 +29548,7 @@
                   <a:srgbClr val="000000"/>
                 </a:solidFill>
               </a:rPr>
-              <a:t> Start from a serial reference</a:t>
+              <a:t> Implemented</a:t>
             </a:r>
             <a:r>
               <a:rPr sz="1913">
@@ -29628,7 +29556,7 @@
                   <a:srgbClr val="000000"/>
                 </a:solidFill>
               </a:rPr>
-              <a:t> — Preserve std behavior before changing policy or data placement.</a:t>
+              <a:t> — Missing device synchronization; iterator-category failure; stable-ordering contract; move-only numeric accumulator.</a:t>
             </a:r>
           </a:p>
           <a:p xmlns:a="http://schemas.openxmlformats.org/drawingml/2006/main">
@@ -29649,7 +29577,7 @@
                   <a:srgbClr val="000000"/>
                 </a:solidFill>
               </a:rPr>
-              <a:t> Describe data and iterators</a:t>
+              <a:t> Incident evidence</a:t>
             </a:r>
             <a:r>
               <a:rPr sz="1913">
@@ -29657,7 +29585,7 @@
                   <a:srgbClr val="000000"/>
                 </a:solidFill>
               </a:rPr>
-              <a:t> — Host memory, USM, buffers, wrapper types, iterator category, lifetime, and ordering.</a:t>
+              <a:t> — Iterator-category and move-only-accumulator tasks are grounded in maintainer incidents.</a:t>
             </a:r>
           </a:p>
           <a:p xmlns:a="http://schemas.openxmlformats.org/drawingml/2006/main">
@@ -29678,7 +29606,7 @@
                   <a:srgbClr val="000000"/>
                 </a:solidFill>
               </a:rPr>
-              <a:t> Use caller-owned queues</a:t>
+              <a:t> Planned</a:t>
             </a:r>
             <a:r>
               <a:rPr sz="1913">
@@ -29686,7 +29614,7 @@
                   <a:srgbClr val="000000"/>
                 </a:solidFill>
               </a:rPr>
-              <a:t> — Construct device policies from the application’s queue when selection and dependencies already exist.</a:t>
+              <a:t> — Host-or-device sort choice and transfer-inclusive benchmark on declared target hardware.</a:t>
             </a:r>
           </a:p>
           <a:p xmlns:a="http://schemas.openxmlformats.org/drawingml/2006/main">
@@ -29707,7 +29635,7 @@
                   <a:srgbClr val="000000"/>
                 </a:solidFill>
               </a:rPr>
-              <a:t> Synchronize explicitly</a:t>
+              <a:t> What this proves</a:t>
             </a:r>
             <a:r>
               <a:rPr sz="1913">
@@ -29715,36 +29643,7 @@
                   <a:srgbClr val="000000"/>
                 </a:solidFill>
               </a:rPr>
-              <a:t> — Device completion must be proven before results are consumed on the host.</a:t>
-            </a:r>
-          </a:p>
-          <a:p xmlns:a="http://schemas.openxmlformats.org/drawingml/2006/main">
-            <a:pPr marL="30" indent="-18">
-              <a:spcAft>
-                <a:spcPts val="10"/>
-              </a:spcAft>
-              <a:buChar char="•"/>
-              <a:defRPr sz="1913">
-                <a:solidFill>
-                  <a:srgbClr val="000000"/>
-                </a:solidFill>
-              </a:defRPr>
-            </a:pPr>
-            <a:r>
-              <a:rPr sz="1913" b="1">
-                <a:solidFill>
-                  <a:srgbClr val="000000"/>
-                </a:solidFill>
-              </a:rPr>
-              <a:t> Benchmark end to end</a:t>
-            </a:r>
-            <a:r>
-              <a:rPr sz="1913">
-                <a:solidFill>
-                  <a:srgbClr val="000000"/>
-                </a:solidFill>
-              </a:rPr>
-              <a:t> — Include transfers, queue synchronization, launch cost, and representative ranges.</a:t>
+              <a:t> — Current tasks check contracts and repair behavior; they do not mirror the full algorithm support table.</a:t>
             </a:r>
           </a:p>
         </p:txBody>
@@ -29836,7 +29735,7 @@
           <a:lstStyle xmlns:a="http://schemas.openxmlformats.org/drawingml/2006/main"/>
           <a:p xmlns:a="http://schemas.openxmlformats.org/drawingml/2006/main">
             <a:r>
-              <a:t>Evaluation inventory: 4 implemented, 2 device gaps</a:t>
+              <a:t>How we chose the content</a:t>
             </a:r>
           </a:p>
         </p:txBody>
@@ -29886,7 +29785,7 @@
                   <a:srgbClr val="000000"/>
                 </a:solidFill>
               </a:rPr>
-              <a:t> Implemented</a:t>
+              <a:t> Official sources</a:t>
             </a:r>
             <a:r>
               <a:rPr sz="1913">
@@ -29894,7 +29793,7 @@
                   <a:srgbClr val="000000"/>
                 </a:solidFill>
               </a:rPr>
-              <a:t> — Missing device synchronization; iterator-category failure; stable-ordering contract; move-only numeric accumulator.</a:t>
+              <a:t> — Execution-policy docs, device-policy construction, examples, tests, releases, and known issues.</a:t>
             </a:r>
           </a:p>
           <a:p xmlns:a="http://schemas.openxmlformats.org/drawingml/2006/main">
@@ -29915,7 +29814,7 @@
                   <a:srgbClr val="000000"/>
                 </a:solidFill>
               </a:rPr>
-              <a:t> Incident evidence</a:t>
+              <a:t> Standard-library boundary failures</a:t>
             </a:r>
             <a:r>
               <a:rPr sz="1913">
@@ -29923,7 +29822,7 @@
                   <a:srgbClr val="000000"/>
                 </a:solidFill>
               </a:rPr>
-              <a:t> — Iterator-category and move-only-accumulator tasks are grounded in maintainer incidents.</a:t>
+              <a:t> — Iterator categories, stable ordering, move-only types, and device lambda restrictions.</a:t>
             </a:r>
           </a:p>
           <a:p xmlns:a="http://schemas.openxmlformats.org/drawingml/2006/main">
@@ -29944,7 +29843,7 @@
                   <a:srgbClr val="000000"/>
                 </a:solidFill>
               </a:rPr>
-              <a:t> Planned</a:t>
+              <a:t> SYCL execution failures</a:t>
             </a:r>
             <a:r>
               <a:rPr sz="1913">
@@ -29952,7 +29851,7 @@
                   <a:srgbClr val="000000"/>
                 </a:solidFill>
               </a:rPr>
-              <a:t> — Host-or-device sort choice and transfer-inclusive benchmark on declared target hardware.</a:t>
+              <a:t> — Queue ownership, synchronization, lifetime, device selection, and data movement.</a:t>
             </a:r>
           </a:p>
           <a:p xmlns:a="http://schemas.openxmlformats.org/drawingml/2006/main">
@@ -29973,7 +29872,7 @@
                   <a:srgbClr val="000000"/>
                 </a:solidFill>
               </a:rPr>
-              <a:t> What this proves</a:t>
+              <a:t> Deliberate gaps</a:t>
             </a:r>
             <a:r>
               <a:rPr sz="1913">
@@ -29981,7 +29880,7 @@
                   <a:srgbClr val="000000"/>
                 </a:solidFill>
               </a:rPr>
-              <a:t> — Current tasks check contracts and repair behavior; they do not mirror the full algorithm support table.</a:t>
+              <a:t> — A real target lane is required before host/device or transfer-performance claims become evidence.</a:t>
             </a:r>
           </a:p>
         </p:txBody>
@@ -30073,7 +29972,7 @@
           <a:lstStyle xmlns:a="http://schemas.openxmlformats.org/drawingml/2006/main"/>
           <a:p xmlns:a="http://schemas.openxmlformats.org/drawingml/2006/main">
             <a:r>
-              <a:t>How we chose the content</a:t>
+              <a:t>What project ownership would look like</a:t>
             </a:r>
           </a:p>
         </p:txBody>
@@ -30123,7 +30022,7 @@
                   <a:srgbClr val="000000"/>
                 </a:solidFill>
               </a:rPr>
-              <a:t> Official sources</a:t>
+              <a:t> Review policy and algorithm guidance</a:t>
             </a:r>
             <a:r>
               <a:rPr sz="1913">
@@ -30131,7 +30030,7 @@
                   <a:srgbClr val="000000"/>
                 </a:solidFill>
               </a:rPr>
-              <a:t> — Execution-policy docs, device-policy construction, examples, tests, releases, and known issues.</a:t>
+              <a:t> — Especially supported policies, algorithm contracts, iterator restrictions, and queue construction.</a:t>
             </a:r>
           </a:p>
           <a:p xmlns:a="http://schemas.openxmlformats.org/drawingml/2006/main">
@@ -30152,7 +30051,7 @@
                   <a:srgbClr val="000000"/>
                 </a:solidFill>
               </a:rPr>
-              <a:t> Standard-library boundary failures</a:t>
+              <a:t> Keep the boundary with SYCL clear</a:t>
             </a:r>
             <a:r>
               <a:rPr sz="1913">
@@ -30160,7 +30059,7 @@
                   <a:srgbClr val="000000"/>
                 </a:solidFill>
               </a:rPr>
-              <a:t> — Iterator categories, stable ordering, move-only types, and device lambda restrictions.</a:t>
+              <a:t> — Project guidance owns oneDPL behavior; shared SYCL skill owns general toolchain/runtime triage.</a:t>
             </a:r>
           </a:p>
           <a:p xmlns:a="http://schemas.openxmlformats.org/drawingml/2006/main">
@@ -30181,7 +30080,7 @@
                   <a:srgbClr val="000000"/>
                 </a:solidFill>
               </a:rPr>
-              <a:t> SYCL execution failures</a:t>
+              <a:t> Provide real device scenarios</a:t>
             </a:r>
             <a:r>
               <a:rPr sz="1913">
@@ -30189,7 +30088,7 @@
                   <a:srgbClr val="000000"/>
                 </a:solidFill>
               </a:rPr>
-              <a:t> — Queue ownership, synchronization, lifetime, device selection, and data movement.</a:t>
+              <a:t> — Help choose the first host/device decision and transfer-inclusive task worth maintaining.</a:t>
             </a:r>
           </a:p>
           <a:p xmlns:a="http://schemas.openxmlformats.org/drawingml/2006/main">
@@ -30210,7 +30109,7 @@
                   <a:srgbClr val="000000"/>
                 </a:solidFill>
               </a:rPr>
-              <a:t> Deliberate gaps</a:t>
+              <a:t> UXL keeps the machinery</a:t>
             </a:r>
             <a:r>
               <a:rPr sz="1913">
@@ -30218,7 +30117,7 @@
                   <a:srgbClr val="000000"/>
                 </a:solidFill>
               </a:rPr>
-              <a:t> — A real target lane is required before host/device or transfer-performance claims become evidence.</a:t>
+              <a:t> — Common validators, Harbor, dashboards, and vendor-neutral runner contracts remain shared.</a:t>
             </a:r>
           </a:p>
         </p:txBody>
@@ -30310,243 +30209,6 @@
           <a:lstStyle xmlns:a="http://schemas.openxmlformats.org/drawingml/2006/main"/>
           <a:p xmlns:a="http://schemas.openxmlformats.org/drawingml/2006/main">
             <a:r>
-              <a:t>What project ownership would look like</a:t>
-            </a:r>
-          </a:p>
-        </p:txBody>
-      </p:sp>
-      <p:sp>
-        <p:nvSpPr>
-          <p:cNvPr id="3" name="Content Placeholder 2">
-            <a:extLst xmlns:a="http://schemas.openxmlformats.org/drawingml/2006/main">
-              <a:ext uri="{FF2B5EF4-FFF2-40B4-BE49-F238E27FC236}">
-                <a16:creationId xmlns:a16="http://schemas.microsoft.com/office/drawing/2014/main" id="{ECF5C9F1-2691-0BC9-F1E1-01CECB857FE3}"/>
-              </a:ext>
-            </a:extLst>
-          </p:cNvPr>
-          <p:cNvSpPr>
-            <a:spLocks xmlns:a="http://schemas.openxmlformats.org/drawingml/2006/main" noGrp="1"/>
-          </p:cNvSpPr>
-          <p:nvPr>
-            <p:ph type="body" idx="1"/>
-          </p:nvPr>
-        </p:nvSpPr>
-        <p:spPr>
-          <a:xfrm xmlns:a="http://schemas.openxmlformats.org/drawingml/2006/main">
-            <a:off x="838200" y="1825625"/>
-            <a:ext cx="10515600" cy="4351200"/>
-          </a:xfrm>
-        </p:spPr>
-        <p:txBody>
-          <a:bodyPr xmlns:a="http://schemas.openxmlformats.org/drawingml/2006/main" wrap="square" anchor="t">
-            <a:normAutofit fontScale="100000"/>
-          </a:bodyPr>
-          <a:lstStyle xmlns:a="http://schemas.openxmlformats.org/drawingml/2006/main"/>
-          <a:p xmlns:a="http://schemas.openxmlformats.org/drawingml/2006/main">
-            <a:pPr marL="30" indent="-18">
-              <a:spcAft>
-                <a:spcPts val="10"/>
-              </a:spcAft>
-              <a:buChar char="•"/>
-              <a:defRPr sz="1913">
-                <a:solidFill>
-                  <a:srgbClr val="000000"/>
-                </a:solidFill>
-              </a:defRPr>
-            </a:pPr>
-            <a:r>
-              <a:rPr sz="1913" b="1">
-                <a:solidFill>
-                  <a:srgbClr val="000000"/>
-                </a:solidFill>
-              </a:rPr>
-              <a:t> Review policy and algorithm guidance</a:t>
-            </a:r>
-            <a:r>
-              <a:rPr sz="1913">
-                <a:solidFill>
-                  <a:srgbClr val="000000"/>
-                </a:solidFill>
-              </a:rPr>
-              <a:t> — Especially supported policies, algorithm contracts, iterator restrictions, and queue construction.</a:t>
-            </a:r>
-          </a:p>
-          <a:p xmlns:a="http://schemas.openxmlformats.org/drawingml/2006/main">
-            <a:pPr marL="30" indent="-18">
-              <a:spcAft>
-                <a:spcPts val="10"/>
-              </a:spcAft>
-              <a:buChar char="•"/>
-              <a:defRPr sz="1913">
-                <a:solidFill>
-                  <a:srgbClr val="000000"/>
-                </a:solidFill>
-              </a:defRPr>
-            </a:pPr>
-            <a:r>
-              <a:rPr sz="1913" b="1">
-                <a:solidFill>
-                  <a:srgbClr val="000000"/>
-                </a:solidFill>
-              </a:rPr>
-              <a:t> Keep the boundary with SYCL clear</a:t>
-            </a:r>
-            <a:r>
-              <a:rPr sz="1913">
-                <a:solidFill>
-                  <a:srgbClr val="000000"/>
-                </a:solidFill>
-              </a:rPr>
-              <a:t> — Project guidance owns oneDPL behavior; shared SYCL skill owns general toolchain/runtime triage.</a:t>
-            </a:r>
-          </a:p>
-          <a:p xmlns:a="http://schemas.openxmlformats.org/drawingml/2006/main">
-            <a:pPr marL="30" indent="-18">
-              <a:spcAft>
-                <a:spcPts val="10"/>
-              </a:spcAft>
-              <a:buChar char="•"/>
-              <a:defRPr sz="1913">
-                <a:solidFill>
-                  <a:srgbClr val="000000"/>
-                </a:solidFill>
-              </a:defRPr>
-            </a:pPr>
-            <a:r>
-              <a:rPr sz="1913" b="1">
-                <a:solidFill>
-                  <a:srgbClr val="000000"/>
-                </a:solidFill>
-              </a:rPr>
-              <a:t> Provide real device scenarios</a:t>
-            </a:r>
-            <a:r>
-              <a:rPr sz="1913">
-                <a:solidFill>
-                  <a:srgbClr val="000000"/>
-                </a:solidFill>
-              </a:rPr>
-              <a:t> — Help choose the first host/device decision and transfer-inclusive task worth maintaining.</a:t>
-            </a:r>
-          </a:p>
-          <a:p xmlns:a="http://schemas.openxmlformats.org/drawingml/2006/main">
-            <a:pPr marL="30" indent="-18">
-              <a:spcAft>
-                <a:spcPts val="10"/>
-              </a:spcAft>
-              <a:buChar char="•"/>
-              <a:defRPr sz="1913">
-                <a:solidFill>
-                  <a:srgbClr val="000000"/>
-                </a:solidFill>
-              </a:defRPr>
-            </a:pPr>
-            <a:r>
-              <a:rPr sz="1913" b="1">
-                <a:solidFill>
-                  <a:srgbClr val="000000"/>
-                </a:solidFill>
-              </a:rPr>
-              <a:t> UXL keeps the machinery</a:t>
-            </a:r>
-            <a:r>
-              <a:rPr sz="1913">
-                <a:solidFill>
-                  <a:srgbClr val="000000"/>
-                </a:solidFill>
-              </a:rPr>
-              <a:t> — Common validators, Harbor, dashboards, and vendor-neutral runner contracts remain shared.</a:t>
-            </a:r>
-          </a:p>
-        </p:txBody>
-      </p:sp>
-      <p:sp>
-        <p:nvSpPr>
-          <p:cNvPr id="7" name="TextBox 6">
-            <a:extLst xmlns:a="http://schemas.openxmlformats.org/drawingml/2006/main">
-              <a:ext uri="{FF2B5EF4-FFF2-40B4-BE49-F238E27FC236}">
-                <a16:creationId xmlns:a16="http://schemas.microsoft.com/office/drawing/2014/main" id="{E2E6F043-0F84-54F7-A567-6E5851801779}"/>
-              </a:ext>
-            </a:extLst>
-          </p:cNvPr>
-          <p:cNvSpPr>
-            <a:spLocks xmlns:a="http://schemas.openxmlformats.org/drawingml/2006/main" noGrp="1"/>
-          </p:cNvSpPr>
-          <p:nvPr/>
-        </p:nvSpPr>
-        <p:spPr>
-          <a:xfrm xmlns:a="http://schemas.openxmlformats.org/drawingml/2006/main">
-            <a:off x="696174" y="6338986"/>
-            <a:ext cx="284052" cy="307777"/>
-          </a:xfrm>
-          <a:prstGeom xmlns:a="http://schemas.openxmlformats.org/drawingml/2006/main" prst="rect">
-            <a:avLst/>
-          </a:prstGeom>
-          <a:noFill xmlns:a="http://schemas.openxmlformats.org/drawingml/2006/main"/>
-        </p:spPr>
-        <p:txBody>
-          <a:bodyPr xmlns:a="http://schemas.openxmlformats.org/drawingml/2006/main" wrap="none">
-            <a:spAutoFit/>
-          </a:bodyPr>
-          <a:lstStyle xmlns:a="http://schemas.openxmlformats.org/drawingml/2006/main"/>
-          <a:p xmlns:a="http://schemas.openxmlformats.org/drawingml/2006/main">
-            <a:r>
-              <a:t>6</a:t>
-            </a:r>
-          </a:p>
-        </p:txBody>
-      </p:sp>
-    </p:spTree>
-    <p:extLst>
-      <p:ext uri="{BB962C8B-B14F-4D97-AF65-F5344CB8AC3E}">
-        <p14:creationId xmlns:p14="http://schemas.microsoft.com/office/powerpoint/2010/main" val="1742728663"/>
-      </p:ext>
-    </p:extLst>
-  </p:cSld>
-</p:sld>
-</file>
-
-<file path=ppt/slides/slide7.xml><?xml version="1.0" encoding="utf-8"?>
-<p:sld xmlns:p="http://schemas.openxmlformats.org/presentationml/2006/main">
-  <p:cSld>
-    <p:spTree>
-      <p:nvGrpSpPr>
-        <p:cNvPr id="1" name=""/>
-        <p:cNvGrpSpPr/>
-        <p:nvPr/>
-      </p:nvGrpSpPr>
-      <p:grpSpPr>
-        <a:xfrm xmlns:a="http://schemas.openxmlformats.org/drawingml/2006/main"/>
-      </p:grpSpPr>
-      <p:sp>
-        <p:nvSpPr>
-          <p:cNvPr id="2" name="Title 1">
-            <a:extLst xmlns:a="http://schemas.openxmlformats.org/drawingml/2006/main">
-              <a:ext uri="{FF2B5EF4-FFF2-40B4-BE49-F238E27FC236}">
-                <a16:creationId xmlns:a16="http://schemas.microsoft.com/office/drawing/2014/main" id="{F64C2A24-546D-C55C-2C52-97A4957F67E0}"/>
-              </a:ext>
-            </a:extLst>
-          </p:cNvPr>
-          <p:cNvSpPr>
-            <a:spLocks xmlns:a="http://schemas.openxmlformats.org/drawingml/2006/main" noGrp="1"/>
-          </p:cNvSpPr>
-          <p:nvPr>
-            <p:ph type="title" idx="0"/>
-          </p:nvPr>
-        </p:nvSpPr>
-        <p:spPr>
-          <a:xfrm xmlns:a="http://schemas.openxmlformats.org/drawingml/2006/main">
-            <a:off x="838200" y="365125"/>
-            <a:ext cx="10515600" cy="1325700"/>
-          </a:xfrm>
-        </p:spPr>
-        <p:txBody>
-          <a:bodyPr xmlns:a="http://schemas.openxmlformats.org/drawingml/2006/main">
-            <a:normAutofit fontScale="100000"/>
-          </a:bodyPr>
-          <a:lstStyle xmlns:a="http://schemas.openxmlformats.org/drawingml/2006/main"/>
-          <a:p xmlns:a="http://schemas.openxmlformats.org/drawingml/2006/main">
-            <a:r>
               <a:t>A focused 30-minute maintainer review</a:t>
             </a:r>
           </a:p>
@@ -30757,7 +30419,7 @@
           <a:lstStyle xmlns:a="http://schemas.openxmlformats.org/drawingml/2006/main"/>
           <a:p xmlns:a="http://schemas.openxmlformats.org/drawingml/2006/main">
             <a:r>
-              <a:t>7</a:t>
+              <a:t>6</a:t>
             </a:r>
           </a:p>
         </p:txBody>

--- a/evaluation/dashboard/public/decks/uxl-onedpl-maintainer-briefing.pptx
+++ b/evaluation/dashboard/public/decks/uxl-onedpl-maintainer-briefing.pptx
@@ -2,19 +2,19 @@
 <file path=ppt/presentation.xml><?xml version="1.0" encoding="utf-8"?>
 <p:presentation xmlns:p="http://schemas.openxmlformats.org/presentationml/2006/main">
   <p:sldMasterIdLst>
-    <p:sldMasterId xmlns:r="http://schemas.openxmlformats.org/officeDocument/2006/relationships" id="2147483648" r:id="R0a3e4585fd844b17"/>
-    <p:sldMasterId xmlns:r="http://schemas.openxmlformats.org/officeDocument/2006/relationships" id="2147483665" r:id="R37e9b1a517654061"/>
+    <p:sldMasterId xmlns:r="http://schemas.openxmlformats.org/officeDocument/2006/relationships" id="2147483648" r:id="R83ac668f50d44f71"/>
+    <p:sldMasterId xmlns:r="http://schemas.openxmlformats.org/officeDocument/2006/relationships" id="2147483665" r:id="R4739840d44204c50"/>
   </p:sldMasterIdLst>
   <p:notesMasterIdLst>
-    <p:notesMasterId xmlns:r="http://schemas.openxmlformats.org/officeDocument/2006/relationships" r:id="Red22d16f78224b22"/>
+    <p:notesMasterId xmlns:r="http://schemas.openxmlformats.org/officeDocument/2006/relationships" r:id="Rdaec9fa40a0d46c6"/>
   </p:notesMasterIdLst>
   <p:sldIdLst>
-    <p:sldId xmlns:r="http://schemas.openxmlformats.org/officeDocument/2006/relationships" id="256" r:id="R475920009c11471a"/>
-    <p:sldId xmlns:r="http://schemas.openxmlformats.org/officeDocument/2006/relationships" id="257" r:id="Ra90483d593a94449"/>
-    <p:sldId xmlns:r="http://schemas.openxmlformats.org/officeDocument/2006/relationships" id="258" r:id="Rbe29e17ce0f44dde"/>
-    <p:sldId xmlns:r="http://schemas.openxmlformats.org/officeDocument/2006/relationships" id="259" r:id="R740751b60d9f4083"/>
-    <p:sldId xmlns:r="http://schemas.openxmlformats.org/officeDocument/2006/relationships" id="260" r:id="R59e2c328d2e54c20"/>
-    <p:sldId xmlns:r="http://schemas.openxmlformats.org/officeDocument/2006/relationships" id="261" r:id="R3d36d1a1594e4ebe"/>
+    <p:sldId xmlns:r="http://schemas.openxmlformats.org/officeDocument/2006/relationships" id="256" r:id="R3e6018c2bec54db6"/>
+    <p:sldId xmlns:r="http://schemas.openxmlformats.org/officeDocument/2006/relationships" id="257" r:id="R30a612d7a79340ad"/>
+    <p:sldId xmlns:r="http://schemas.openxmlformats.org/officeDocument/2006/relationships" id="258" r:id="R735823a2a62043b4"/>
+    <p:sldId xmlns:r="http://schemas.openxmlformats.org/officeDocument/2006/relationships" id="259" r:id="R5f400504edde4d3f"/>
+    <p:sldId xmlns:r="http://schemas.openxmlformats.org/officeDocument/2006/relationships" id="260" r:id="R070f88a72ba94f0b"/>
+    <p:sldId xmlns:r="http://schemas.openxmlformats.org/officeDocument/2006/relationships" id="261" r:id="R43c86f17865d4aca"/>
   </p:sldIdLst>
   <p:sldSz cx="12192000" cy="6858000"/>
   <p:notesSz cx="6858000" cy="9144000"/>
@@ -493,7 +493,17 @@
           </a:p>
           <a:p xmlns:a="http://schemas.openxmlformats.org/drawingml/2006/main">
             <a:r>
+              <a:t>- https://github.com/uxlfoundation/skills/blob/main/docs/maintainer-review/uxl-onedpl.md</a:t>
+            </a:r>
+          </a:p>
+          <a:p xmlns:a="http://schemas.openxmlformats.org/drawingml/2006/main">
+            <a:r>
               <a:t>- https://github.com/uxlfoundation/skills/blob/main/evaluation/harbor/suites.json</a:t>
+            </a:r>
+          </a:p>
+          <a:p xmlns:a="http://schemas.openxmlformats.org/drawingml/2006/main">
+            <a:r>
+              <a:t>- https://github.com/uxlfoundation/skills/blob/main/evaluation/harbor/EVALUATOR_POLICY.md</a:t>
             </a:r>
           </a:p>
           <a:p xmlns:a="http://schemas.openxmlformats.org/drawingml/2006/main">
@@ -508,7 +518,22 @@
           </a:p>
           <a:p xmlns:a="http://schemas.openxmlformats.org/drawingml/2006/main">
             <a:r>
-              <a:t>Speaker cue: oneDPL skill: keep policy, data, and synchronization aligned</a:t>
+              <a:t>Presenter guidance</a:t>
+            </a:r>
+          </a:p>
+          <a:p xmlns:a="http://schemas.openxmlformats.org/drawingml/2006/main">
+            <a:r>
+              <a:t>Purpose: Introduce the draft oneDPL skill and its current evaluation coverage.</a:t>
+            </a:r>
+          </a:p>
+          <a:p xmlns:a="http://schemas.openxmlformats.org/drawingml/2006/main">
+            <a:r>
+              <a:t>Explain: The skill helps coding agents reason about host and device execution policies, iterator validity, data lifetime, synchronization, ordering, and toolchain/runtime boundaries.</a:t>
+            </a:r>
+          </a:p>
+          <a:p xmlns:a="http://schemas.openxmlformats.org/drawingml/2006/main">
+            <a:r>
+              <a:t>Emphasize: This is a UXL-authored starting point awaiting project review, not approved maintainer guidance.</a:t>
             </a:r>
           </a:p>
         </p:txBody>
@@ -593,7 +618,17 @@
           </a:p>
           <a:p xmlns:a="http://schemas.openxmlformats.org/drawingml/2006/main">
             <a:r>
+              <a:t>- https://github.com/uxlfoundation/skills/blob/main/docs/maintainer-review/uxl-onedpl.md</a:t>
+            </a:r>
+          </a:p>
+          <a:p xmlns:a="http://schemas.openxmlformats.org/drawingml/2006/main">
+            <a:r>
               <a:t>- https://github.com/uxlfoundation/skills/blob/main/evaluation/harbor/suites.json</a:t>
+            </a:r>
+          </a:p>
+          <a:p xmlns:a="http://schemas.openxmlformats.org/drawingml/2006/main">
+            <a:r>
+              <a:t>- https://github.com/uxlfoundation/skills/blob/main/evaluation/harbor/EVALUATOR_POLICY.md</a:t>
             </a:r>
           </a:p>
           <a:p xmlns:a="http://schemas.openxmlformats.org/drawingml/2006/main">
@@ -608,7 +643,22 @@
           </a:p>
           <a:p xmlns:a="http://schemas.openxmlformats.org/drawingml/2006/main">
             <a:r>
-              <a:t>Speaker cue: What the skill tells an agent today</a:t>
+              <a:t>Presenter guidance</a:t>
+            </a:r>
+          </a:p>
+          <a:p xmlns:a="http://schemas.openxmlformats.org/drawingml/2006/main">
+            <a:r>
+              <a:t>Purpose: Walk through the behavior the skill asks an agent to follow today.</a:t>
+            </a:r>
+          </a:p>
+          <a:p xmlns:a="http://schemas.openxmlformats.org/drawingml/2006/main">
+            <a:r>
+              <a:t>Explain: The intended sequence is to select the execution policy and device deliberately, validate iterator and lifetime contracts, synchronize before observing results, and separate toolchain, runtime, and algorithm failures.</a:t>
+            </a:r>
+          </a:p>
+          <a:p xmlns:a="http://schemas.openxmlformats.org/drawingml/2006/main">
+            <a:r>
+              <a:t>Emphasize: A useful answer ends with reproducible evidence and a clear failure classification, not a plausible-looking command alone.</a:t>
             </a:r>
           </a:p>
         </p:txBody>
@@ -693,7 +743,17 @@
           </a:p>
           <a:p xmlns:a="http://schemas.openxmlformats.org/drawingml/2006/main">
             <a:r>
+              <a:t>- https://github.com/uxlfoundation/skills/blob/main/docs/maintainer-review/uxl-onedpl.md</a:t>
+            </a:r>
+          </a:p>
+          <a:p xmlns:a="http://schemas.openxmlformats.org/drawingml/2006/main">
+            <a:r>
               <a:t>- https://github.com/uxlfoundation/skills/blob/main/evaluation/harbor/suites.json</a:t>
+            </a:r>
+          </a:p>
+          <a:p xmlns:a="http://schemas.openxmlformats.org/drawingml/2006/main">
+            <a:r>
+              <a:t>- https://github.com/uxlfoundation/skills/blob/main/evaluation/harbor/EVALUATOR_POLICY.md</a:t>
             </a:r>
           </a:p>
           <a:p xmlns:a="http://schemas.openxmlformats.org/drawingml/2006/main">
@@ -708,7 +768,22 @@
           </a:p>
           <a:p xmlns:a="http://schemas.openxmlformats.org/drawingml/2006/main">
             <a:r>
-              <a:t>Speaker cue: Evaluation inventory: 4 implemented, 2 device gaps</a:t>
+              <a:t>Presenter guidance</a:t>
+            </a:r>
+          </a:p>
+          <a:p xmlns:a="http://schemas.openxmlformats.org/drawingml/2006/main">
+            <a:r>
+              <a:t>Purpose: Separate evaluation inventory from evidence that the skill improves outcomes.</a:t>
+            </a:r>
+          </a:p>
+          <a:p xmlns:a="http://schemas.openxmlformats.org/drawingml/2006/main">
+            <a:r>
+              <a:t>Explain: 4 of 6 evaluation tasks are implemented; four hosted scenarios test portable contracts; two device-dependent gaps remain until a qualified target lane can exercise them without favoring a vendor.</a:t>
+            </a:r>
+          </a:p>
+          <a:p xmlns:a="http://schemas.openxmlformats.org/drawingml/2006/main">
+            <a:r>
+              <a:t>Emphasize: Implemented means the task can run. It does not mean the task passes, discriminates between treatments, or supports a promotion claim.</a:t>
             </a:r>
           </a:p>
         </p:txBody>
@@ -793,7 +868,17 @@
           </a:p>
           <a:p xmlns:a="http://schemas.openxmlformats.org/drawingml/2006/main">
             <a:r>
+              <a:t>- https://github.com/uxlfoundation/skills/blob/main/docs/maintainer-review/uxl-onedpl.md</a:t>
+            </a:r>
+          </a:p>
+          <a:p xmlns:a="http://schemas.openxmlformats.org/drawingml/2006/main">
+            <a:r>
               <a:t>- https://github.com/uxlfoundation/skills/blob/main/evaluation/harbor/suites.json</a:t>
+            </a:r>
+          </a:p>
+          <a:p xmlns:a="http://schemas.openxmlformats.org/drawingml/2006/main">
+            <a:r>
+              <a:t>- https://github.com/uxlfoundation/skills/blob/main/evaluation/harbor/EVALUATOR_POLICY.md</a:t>
             </a:r>
           </a:p>
           <a:p xmlns:a="http://schemas.openxmlformats.org/drawingml/2006/main">
@@ -808,7 +893,22 @@
           </a:p>
           <a:p xmlns:a="http://schemas.openxmlformats.org/drawingml/2006/main">
             <a:r>
-              <a:t>Speaker cue: How we chose the content</a:t>
+              <a:t>Presenter guidance</a:t>
+            </a:r>
+          </a:p>
+          <a:p xmlns:a="http://schemas.openxmlformats.org/drawingml/2006/main">
+            <a:r>
+              <a:t>Purpose: Show how the draft guidance and task set were selected.</a:t>
+            </a:r>
+          </a:p>
+          <a:p xmlns:a="http://schemas.openxmlformats.org/drawingml/2006/main">
+            <a:r>
+              <a:t>Explain: The starting material comes from official oneDPL and SYCL documentation, examples, tests, and failure boundaries around policies, iterators, lifetime, synchronization, and fallback behavior.</a:t>
+            </a:r>
+          </a:p>
+          <a:p xmlns:a="http://schemas.openxmlformats.org/drawingml/2006/main">
+            <a:r>
+              <a:t>Emphasize: Maintainers should correct, remove, or replace anything that does not reflect current project practice.</a:t>
             </a:r>
           </a:p>
         </p:txBody>
@@ -893,7 +993,17 @@
           </a:p>
           <a:p xmlns:a="http://schemas.openxmlformats.org/drawingml/2006/main">
             <a:r>
+              <a:t>- https://github.com/uxlfoundation/skills/blob/main/docs/maintainer-review/uxl-onedpl.md</a:t>
+            </a:r>
+          </a:p>
+          <a:p xmlns:a="http://schemas.openxmlformats.org/drawingml/2006/main">
+            <a:r>
               <a:t>- https://github.com/uxlfoundation/skills/blob/main/evaluation/harbor/suites.json</a:t>
+            </a:r>
+          </a:p>
+          <a:p xmlns:a="http://schemas.openxmlformats.org/drawingml/2006/main">
+            <a:r>
+              <a:t>- https://github.com/uxlfoundation/skills/blob/main/evaluation/harbor/EVALUATOR_POLICY.md</a:t>
             </a:r>
           </a:p>
           <a:p xmlns:a="http://schemas.openxmlformats.org/drawingml/2006/main">
@@ -908,7 +1018,22 @@
           </a:p>
           <a:p xmlns:a="http://schemas.openxmlformats.org/drawingml/2006/main">
             <a:r>
-              <a:t>Speaker cue: What project ownership would look like</a:t>
+              <a:t>Presenter guidance</a:t>
+            </a:r>
+          </a:p>
+          <a:p xmlns:a="http://schemas.openxmlformats.org/drawingml/2006/main">
+            <a:r>
+              <a:t>Purpose: Clarify the proposed ownership boundary.</a:t>
+            </a:r>
+          </a:p>
+          <a:p xmlns:a="http://schemas.openxmlformats.org/drawingml/2006/main">
+            <a:r>
+              <a:t>Explain: oneDPL maintainers own triggers, API truth, source freshness, limitations, and authentic cases; UXL maintains the catalog, Harbor integration, comparison design, and dashboard.</a:t>
+            </a:r>
+          </a:p>
+          <a:p xmlns:a="http://schemas.openxmlformats.org/drawingml/2006/main">
+            <a:r>
+              <a:t>Emphasize: The skill cannot move beyond its incubating state without named project review.</a:t>
             </a:r>
           </a:p>
         </p:txBody>
@@ -993,7 +1118,17 @@
           </a:p>
           <a:p xmlns:a="http://schemas.openxmlformats.org/drawingml/2006/main">
             <a:r>
+              <a:t>- https://github.com/uxlfoundation/skills/blob/main/docs/maintainer-review/uxl-onedpl.md</a:t>
+            </a:r>
+          </a:p>
+          <a:p xmlns:a="http://schemas.openxmlformats.org/drawingml/2006/main">
+            <a:r>
               <a:t>- https://github.com/uxlfoundation/skills/blob/main/evaluation/harbor/suites.json</a:t>
+            </a:r>
+          </a:p>
+          <a:p xmlns:a="http://schemas.openxmlformats.org/drawingml/2006/main">
+            <a:r>
+              <a:t>- https://github.com/uxlfoundation/skills/blob/main/evaluation/harbor/EVALUATOR_POLICY.md</a:t>
             </a:r>
           </a:p>
           <a:p xmlns:a="http://schemas.openxmlformats.org/drawingml/2006/main">
@@ -1008,7 +1143,22 @@
           </a:p>
           <a:p xmlns:a="http://schemas.openxmlformats.org/drawingml/2006/main">
             <a:r>
-              <a:t>Speaker cue: A focused 30-minute maintainer review</a:t>
+              <a:t>Presenter guidance</a:t>
+            </a:r>
+          </a:p>
+          <a:p xmlns:a="http://schemas.openxmlformats.org/drawingml/2006/main">
+            <a:r>
+              <a:t>Purpose: End with a small, concrete review request.</a:t>
+            </a:r>
+          </a:p>
+          <a:p xmlns:a="http://schemas.openxmlformats.org/drawingml/2006/main">
+            <a:r>
+              <a:t>Explain: Ask maintainers to check the trigger and technical guidance, judge the task inventory, and name a reviewer or owner.</a:t>
+            </a:r>
+          </a:p>
+          <a:p xmlns:a="http://schemas.openxmlformats.org/drawingml/2006/main">
+            <a:r>
+              <a:t>Emphasize: The desired output is specific corrections and realistic cases, not blanket endorsement of the draft.</a:t>
             </a:r>
           </a:p>
         </p:txBody>
@@ -1044,7 +1194,7 @@
     <p:bg>
       <p:bgPr>
         <a:blipFill xmlns:a="http://schemas.openxmlformats.org/drawingml/2006/main">
-          <a:blip xmlns:r="http://schemas.openxmlformats.org/officeDocument/2006/relationships" r:embed="R8e0a059ca86e439f">
+          <a:blip xmlns:r="http://schemas.openxmlformats.org/officeDocument/2006/relationships" r:embed="R2364fd1fd9e940c3">
             <a:alphaModFix/>
           </a:blip>
           <a:stretch>
@@ -1479,7 +1629,7 @@
           <p:nvPr/>
         </p:nvPicPr>
         <p:blipFill rotWithShape="1">
-          <a:blip xmlns:r="http://schemas.openxmlformats.org/officeDocument/2006/relationships" xmlns:a="http://schemas.openxmlformats.org/drawingml/2006/main" r:embed="Re37277eba2564d15">
+          <a:blip xmlns:r="http://schemas.openxmlformats.org/officeDocument/2006/relationships" xmlns:a="http://schemas.openxmlformats.org/drawingml/2006/main" r:embed="R672eb441a0364c70">
             <a:alphaModFix/>
           </a:blip>
           <a:srcRect xmlns:a="http://schemas.openxmlformats.org/drawingml/2006/main" l="0" t="0" r="0" b="0"/>
@@ -1509,7 +1659,7 @@
     <p:bg>
       <p:bgPr>
         <a:blipFill xmlns:a="http://schemas.openxmlformats.org/drawingml/2006/main">
-          <a:blip xmlns:r="http://schemas.openxmlformats.org/officeDocument/2006/relationships" r:embed="R2496b3061bdf4f74">
+          <a:blip xmlns:r="http://schemas.openxmlformats.org/officeDocument/2006/relationships" r:embed="Rb5d573fe1105402c">
             <a:alphaModFix/>
           </a:blip>
           <a:stretch>
@@ -2543,7 +2693,7 @@
           <p:nvPr/>
         </p:nvPicPr>
         <p:blipFill rotWithShape="1">
-          <a:blip xmlns:r="http://schemas.openxmlformats.org/officeDocument/2006/relationships" xmlns:a="http://schemas.openxmlformats.org/drawingml/2006/main" r:embed="Ra4359fa8e46d4f97">
+          <a:blip xmlns:r="http://schemas.openxmlformats.org/officeDocument/2006/relationships" xmlns:a="http://schemas.openxmlformats.org/drawingml/2006/main" r:embed="R02e94dbf401347c1">
             <a:alphaModFix/>
           </a:blip>
           <a:srcRect xmlns:a="http://schemas.openxmlformats.org/drawingml/2006/main" l="0" t="0" r="0" b="0"/>
@@ -3567,7 +3717,7 @@
           <p:nvPr/>
         </p:nvPicPr>
         <p:blipFill rotWithShape="1">
-          <a:blip xmlns:r="http://schemas.openxmlformats.org/officeDocument/2006/relationships" xmlns:a="http://schemas.openxmlformats.org/drawingml/2006/main" r:embed="Rb4b7cce20a094904">
+          <a:blip xmlns:r="http://schemas.openxmlformats.org/officeDocument/2006/relationships" xmlns:a="http://schemas.openxmlformats.org/drawingml/2006/main" r:embed="Rcdf2f34893dd455c">
             <a:alphaModFix/>
           </a:blip>
           <a:srcRect xmlns:a="http://schemas.openxmlformats.org/drawingml/2006/main" l="0" t="0" r="0" b="0"/>
@@ -3597,7 +3747,7 @@
     <p:bg>
       <p:bgPr>
         <a:blipFill xmlns:a="http://schemas.openxmlformats.org/drawingml/2006/main">
-          <a:blip xmlns:r="http://schemas.openxmlformats.org/officeDocument/2006/relationships" r:embed="R3f40666c57b9491e">
+          <a:blip xmlns:r="http://schemas.openxmlformats.org/officeDocument/2006/relationships" r:embed="R927aeb2690404635">
             <a:alphaModFix/>
           </a:blip>
           <a:stretch>
@@ -4871,7 +5021,7 @@
           <p:nvPr/>
         </p:nvPicPr>
         <p:blipFill rotWithShape="1">
-          <a:blip xmlns:r="http://schemas.openxmlformats.org/officeDocument/2006/relationships" xmlns:a="http://schemas.openxmlformats.org/drawingml/2006/main" r:embed="R0ab6817d06e347b3">
+          <a:blip xmlns:r="http://schemas.openxmlformats.org/officeDocument/2006/relationships" xmlns:a="http://schemas.openxmlformats.org/drawingml/2006/main" r:embed="R923d479635394652">
             <a:alphaModFix/>
           </a:blip>
           <a:srcRect xmlns:a="http://schemas.openxmlformats.org/drawingml/2006/main" l="0" t="0" r="0" b="0"/>
@@ -8115,7 +8265,7 @@
           <p:nvPr/>
         </p:nvPicPr>
         <p:blipFill rotWithShape="1">
-          <a:blip xmlns:r="http://schemas.openxmlformats.org/officeDocument/2006/relationships" xmlns:a="http://schemas.openxmlformats.org/drawingml/2006/main" r:embed="Re3742e0d85b54b4f">
+          <a:blip xmlns:r="http://schemas.openxmlformats.org/officeDocument/2006/relationships" xmlns:a="http://schemas.openxmlformats.org/drawingml/2006/main" r:embed="R8e41653859cb4eb3">
             <a:alphaModFix/>
           </a:blip>
           <a:srcRect xmlns:a="http://schemas.openxmlformats.org/drawingml/2006/main" l="0" t="0" r="0" b="0"/>
@@ -9853,7 +10003,7 @@
           <p:nvPr/>
         </p:nvPicPr>
         <p:blipFill rotWithShape="1">
-          <a:blip xmlns:r="http://schemas.openxmlformats.org/officeDocument/2006/relationships" xmlns:a="http://schemas.openxmlformats.org/drawingml/2006/main" r:embed="R0f19e336e44d4181">
+          <a:blip xmlns:r="http://schemas.openxmlformats.org/officeDocument/2006/relationships" xmlns:a="http://schemas.openxmlformats.org/drawingml/2006/main" r:embed="Rc533a3040a7f4d61">
             <a:alphaModFix/>
           </a:blip>
           <a:srcRect xmlns:a="http://schemas.openxmlformats.org/drawingml/2006/main" l="0" t="0" r="0" b="0"/>
@@ -16682,7 +16832,7 @@
     <p:bg>
       <p:bgPr>
         <a:blipFill xmlns:a="http://schemas.openxmlformats.org/drawingml/2006/main">
-          <a:blip xmlns:r="http://schemas.openxmlformats.org/officeDocument/2006/relationships" r:embed="R8236ec10af354758">
+          <a:blip xmlns:r="http://schemas.openxmlformats.org/officeDocument/2006/relationships" r:embed="R2fa9f7c514cd4cd4">
             <a:alphaModFix/>
           </a:blip>
           <a:stretch>
@@ -17117,7 +17267,7 @@
           <p:nvPr/>
         </p:nvPicPr>
         <p:blipFill rotWithShape="1">
-          <a:blip xmlns:r="http://schemas.openxmlformats.org/officeDocument/2006/relationships" xmlns:a="http://schemas.openxmlformats.org/drawingml/2006/main" r:embed="Rb9abe82d342643ba">
+          <a:blip xmlns:r="http://schemas.openxmlformats.org/officeDocument/2006/relationships" xmlns:a="http://schemas.openxmlformats.org/drawingml/2006/main" r:embed="R7160c44001de4aaf">
             <a:alphaModFix/>
           </a:blip>
           <a:srcRect xmlns:a="http://schemas.openxmlformats.org/drawingml/2006/main" l="0" t="0" r="0" b="0"/>
@@ -17147,7 +17297,7 @@
     <p:bg>
       <p:bgPr>
         <a:blipFill xmlns:a="http://schemas.openxmlformats.org/drawingml/2006/main">
-          <a:blip xmlns:r="http://schemas.openxmlformats.org/officeDocument/2006/relationships" r:embed="R021c2426968648cc">
+          <a:blip xmlns:r="http://schemas.openxmlformats.org/officeDocument/2006/relationships" r:embed="R2e53d44d92044135">
             <a:alphaModFix/>
           </a:blip>
           <a:stretch>
@@ -17780,7 +17930,7 @@
           <p:nvPr/>
         </p:nvPicPr>
         <p:blipFill rotWithShape="1">
-          <a:blip xmlns:r="http://schemas.openxmlformats.org/officeDocument/2006/relationships" xmlns:a="http://schemas.openxmlformats.org/drawingml/2006/main" r:embed="Rcd33ee80c36d43e5">
+          <a:blip xmlns:r="http://schemas.openxmlformats.org/officeDocument/2006/relationships" xmlns:a="http://schemas.openxmlformats.org/drawingml/2006/main" r:embed="Ra721143ca3f14704">
             <a:alphaModFix/>
           </a:blip>
           <a:srcRect xmlns:a="http://schemas.openxmlformats.org/drawingml/2006/main" l="0" t="0" r="0" b="0"/>
@@ -18240,7 +18390,7 @@
     <p:bg>
       <p:bgPr>
         <a:blipFill xmlns:a="http://schemas.openxmlformats.org/drawingml/2006/main">
-          <a:blip xmlns:r="http://schemas.openxmlformats.org/officeDocument/2006/relationships" r:embed="R7949a7e3e1734696">
+          <a:blip xmlns:r="http://schemas.openxmlformats.org/officeDocument/2006/relationships" r:embed="Rd658d239b09d4475">
             <a:alphaModFix/>
           </a:blip>
           <a:stretch>
@@ -18873,7 +19023,7 @@
           <p:nvPr/>
         </p:nvPicPr>
         <p:blipFill rotWithShape="1">
-          <a:blip xmlns:r="http://schemas.openxmlformats.org/officeDocument/2006/relationships" xmlns:a="http://schemas.openxmlformats.org/drawingml/2006/main" r:embed="R47c2463b01e14fbe">
+          <a:blip xmlns:r="http://schemas.openxmlformats.org/officeDocument/2006/relationships" xmlns:a="http://schemas.openxmlformats.org/drawingml/2006/main" r:embed="R4526a6b9e4ba47d7">
             <a:alphaModFix/>
           </a:blip>
           <a:srcRect xmlns:a="http://schemas.openxmlformats.org/drawingml/2006/main" l="0" t="0" r="0" b="0"/>
@@ -21529,7 +21679,7 @@
           <p:nvPr/>
         </p:nvPicPr>
         <p:blipFill rotWithShape="1">
-          <a:blip xmlns:r="http://schemas.openxmlformats.org/officeDocument/2006/relationships" xmlns:a="http://schemas.openxmlformats.org/drawingml/2006/main" r:embed="R341f5b247b27461d">
+          <a:blip xmlns:r="http://schemas.openxmlformats.org/officeDocument/2006/relationships" xmlns:a="http://schemas.openxmlformats.org/drawingml/2006/main" r:embed="R16f6ef0386914d56">
             <a:alphaModFix/>
           </a:blip>
           <a:srcRect xmlns:a="http://schemas.openxmlformats.org/drawingml/2006/main" l="0" t="0" r="0" b="0"/>
@@ -21559,7 +21709,7 @@
     <p:bg>
       <p:bgPr>
         <a:blipFill xmlns:a="http://schemas.openxmlformats.org/drawingml/2006/main">
-          <a:blip xmlns:r="http://schemas.openxmlformats.org/officeDocument/2006/relationships" r:embed="R7ad8f22fe7f445e9">
+          <a:blip xmlns:r="http://schemas.openxmlformats.org/officeDocument/2006/relationships" r:embed="R2e547b45dd634f1b">
             <a:alphaModFix/>
           </a:blip>
           <a:stretch>
@@ -22403,7 +22553,7 @@
           <p:nvPr/>
         </p:nvPicPr>
         <p:blipFill rotWithShape="1">
-          <a:blip xmlns:r="http://schemas.openxmlformats.org/officeDocument/2006/relationships" xmlns:a="http://schemas.openxmlformats.org/drawingml/2006/main" r:embed="R56ce99032ad54799">
+          <a:blip xmlns:r="http://schemas.openxmlformats.org/officeDocument/2006/relationships" xmlns:a="http://schemas.openxmlformats.org/drawingml/2006/main" r:embed="Rf7228fe2e34d43fc">
             <a:alphaModFix/>
           </a:blip>
           <a:srcRect xmlns:a="http://schemas.openxmlformats.org/drawingml/2006/main" l="0" t="0" r="0" b="0"/>
@@ -22433,7 +22583,7 @@
     <p:bg>
       <p:bgPr>
         <a:blipFill xmlns:a="http://schemas.openxmlformats.org/drawingml/2006/main">
-          <a:blip xmlns:r="http://schemas.openxmlformats.org/officeDocument/2006/relationships" r:embed="R224e5f437967449f">
+          <a:blip xmlns:r="http://schemas.openxmlformats.org/officeDocument/2006/relationships" r:embed="R59da754b38154bbc">
             <a:alphaModFix/>
           </a:blip>
           <a:stretch>
@@ -23381,7 +23531,7 @@
           <p:nvPr/>
         </p:nvPicPr>
         <p:blipFill rotWithShape="1">
-          <a:blip xmlns:r="http://schemas.openxmlformats.org/officeDocument/2006/relationships" xmlns:a="http://schemas.openxmlformats.org/drawingml/2006/main" r:embed="R2bc50baf7bd04869">
+          <a:blip xmlns:r="http://schemas.openxmlformats.org/officeDocument/2006/relationships" xmlns:a="http://schemas.openxmlformats.org/drawingml/2006/main" r:embed="Rafc9389a79ca43a9">
             <a:alphaModFix/>
           </a:blip>
           <a:srcRect xmlns:a="http://schemas.openxmlformats.org/drawingml/2006/main" l="0" t="0" r="0" b="0"/>
@@ -23411,7 +23561,7 @@
     <p:bg>
       <p:bgPr>
         <a:blipFill xmlns:a="http://schemas.openxmlformats.org/drawingml/2006/main">
-          <a:blip xmlns:r="http://schemas.openxmlformats.org/officeDocument/2006/relationships" r:embed="R1d9a56dd60054698">
+          <a:blip xmlns:r="http://schemas.openxmlformats.org/officeDocument/2006/relationships" r:embed="Rf26e8bb15f0c42c9">
             <a:alphaModFix/>
           </a:blip>
           <a:stretch>
@@ -23872,7 +24022,7 @@
           <p:nvPr/>
         </p:nvPicPr>
         <p:blipFill rotWithShape="1">
-          <a:blip xmlns:r="http://schemas.openxmlformats.org/officeDocument/2006/relationships" xmlns:a="http://schemas.openxmlformats.org/drawingml/2006/main" r:embed="Rb04a54de7b0c41d6">
+          <a:blip xmlns:r="http://schemas.openxmlformats.org/officeDocument/2006/relationships" xmlns:a="http://schemas.openxmlformats.org/drawingml/2006/main" r:embed="Rb026755622d644f2">
             <a:alphaModFix/>
           </a:blip>
           <a:srcRect xmlns:a="http://schemas.openxmlformats.org/drawingml/2006/main" l="0" t="0" r="0" b="0"/>
@@ -25584,22 +25734,22 @@
   </p:cSld>
   <p:clrMap bg1="lt1" tx1="dk1" bg2="dk2" tx2="lt2" accent1="accent1" accent2="accent2" accent3="accent3" accent4="accent4" accent5="accent5" accent6="accent6" hlink="hlink" folHlink="folHlink"/>
   <p:sldLayoutIdLst>
-    <p:sldLayoutId xmlns:r="http://schemas.openxmlformats.org/officeDocument/2006/relationships" id="2147483649" r:id="Rcf3f09037f724694"/>
-    <p:sldLayoutId xmlns:r="http://schemas.openxmlformats.org/officeDocument/2006/relationships" id="2147483650" r:id="Ra42d4783bf5547d4"/>
-    <p:sldLayoutId xmlns:r="http://schemas.openxmlformats.org/officeDocument/2006/relationships" id="2147483651" r:id="R452e38ab58d14a4b"/>
-    <p:sldLayoutId xmlns:r="http://schemas.openxmlformats.org/officeDocument/2006/relationships" id="2147483652" r:id="R2e80c968d3834edb"/>
-    <p:sldLayoutId xmlns:r="http://schemas.openxmlformats.org/officeDocument/2006/relationships" id="2147483653" r:id="R4e15652bffcd4978"/>
-    <p:sldLayoutId xmlns:r="http://schemas.openxmlformats.org/officeDocument/2006/relationships" id="2147483654" r:id="R7b9fa201d31b49a4"/>
-    <p:sldLayoutId xmlns:r="http://schemas.openxmlformats.org/officeDocument/2006/relationships" id="2147483655" r:id="R3fd8a9bec0224171"/>
-    <p:sldLayoutId xmlns:r="http://schemas.openxmlformats.org/officeDocument/2006/relationships" id="2147483656" r:id="R324eb797c1804d21"/>
-    <p:sldLayoutId xmlns:r="http://schemas.openxmlformats.org/officeDocument/2006/relationships" id="2147483657" r:id="Ra205500b78cb40f8"/>
-    <p:sldLayoutId xmlns:r="http://schemas.openxmlformats.org/officeDocument/2006/relationships" id="2147483658" r:id="R2904a269b7d94863"/>
-    <p:sldLayoutId xmlns:r="http://schemas.openxmlformats.org/officeDocument/2006/relationships" id="2147483659" r:id="R834f7ddeea7f4585"/>
-    <p:sldLayoutId xmlns:r="http://schemas.openxmlformats.org/officeDocument/2006/relationships" id="2147483660" r:id="Rf282299320674a6e"/>
-    <p:sldLayoutId xmlns:r="http://schemas.openxmlformats.org/officeDocument/2006/relationships" id="2147483661" r:id="R871844ef77064e9a"/>
-    <p:sldLayoutId xmlns:r="http://schemas.openxmlformats.org/officeDocument/2006/relationships" id="2147483662" r:id="R2ae68062882d4e37"/>
-    <p:sldLayoutId xmlns:r="http://schemas.openxmlformats.org/officeDocument/2006/relationships" id="2147483663" r:id="Rdf391eff61cc476b"/>
-    <p:sldLayoutId xmlns:r="http://schemas.openxmlformats.org/officeDocument/2006/relationships" id="2147483664" r:id="Rbe17a16bd4e4474d"/>
+    <p:sldLayoutId xmlns:r="http://schemas.openxmlformats.org/officeDocument/2006/relationships" id="2147483649" r:id="R85ea4e605e7c4c1c"/>
+    <p:sldLayoutId xmlns:r="http://schemas.openxmlformats.org/officeDocument/2006/relationships" id="2147483650" r:id="R657e0047301245c1"/>
+    <p:sldLayoutId xmlns:r="http://schemas.openxmlformats.org/officeDocument/2006/relationships" id="2147483651" r:id="R7ab9c7937ecf41c2"/>
+    <p:sldLayoutId xmlns:r="http://schemas.openxmlformats.org/officeDocument/2006/relationships" id="2147483652" r:id="R8d66c618f01041a5"/>
+    <p:sldLayoutId xmlns:r="http://schemas.openxmlformats.org/officeDocument/2006/relationships" id="2147483653" r:id="Rab409783703846f2"/>
+    <p:sldLayoutId xmlns:r="http://schemas.openxmlformats.org/officeDocument/2006/relationships" id="2147483654" r:id="R734b2f268f614c31"/>
+    <p:sldLayoutId xmlns:r="http://schemas.openxmlformats.org/officeDocument/2006/relationships" id="2147483655" r:id="R27a0cb3e28914bbb"/>
+    <p:sldLayoutId xmlns:r="http://schemas.openxmlformats.org/officeDocument/2006/relationships" id="2147483656" r:id="R3840596eec3e4d60"/>
+    <p:sldLayoutId xmlns:r="http://schemas.openxmlformats.org/officeDocument/2006/relationships" id="2147483657" r:id="Ra9f8e747093d4e22"/>
+    <p:sldLayoutId xmlns:r="http://schemas.openxmlformats.org/officeDocument/2006/relationships" id="2147483658" r:id="Rb867338bcdc74f6e"/>
+    <p:sldLayoutId xmlns:r="http://schemas.openxmlformats.org/officeDocument/2006/relationships" id="2147483659" r:id="Rfc07e222615540b8"/>
+    <p:sldLayoutId xmlns:r="http://schemas.openxmlformats.org/officeDocument/2006/relationships" id="2147483660" r:id="R86711dfff21f4503"/>
+    <p:sldLayoutId xmlns:r="http://schemas.openxmlformats.org/officeDocument/2006/relationships" id="2147483661" r:id="R4adab14e840a47e4"/>
+    <p:sldLayoutId xmlns:r="http://schemas.openxmlformats.org/officeDocument/2006/relationships" id="2147483662" r:id="R8c042007d3e840d1"/>
+    <p:sldLayoutId xmlns:r="http://schemas.openxmlformats.org/officeDocument/2006/relationships" id="2147483663" r:id="R2ede5bdbc1ba4aca"/>
+    <p:sldLayoutId xmlns:r="http://schemas.openxmlformats.org/officeDocument/2006/relationships" id="2147483664" r:id="R47c5fc8c3a7d4cae"/>
   </p:sldLayoutIdLst>
   <p:hf hdr="0" ftr="0" dt="0"/>
   <p:txStyles>
@@ -27792,7 +27942,7 @@
           <p:nvPr/>
         </p:nvPicPr>
         <p:blipFill rotWithShape="1">
-          <a:blip xmlns:r="http://schemas.openxmlformats.org/officeDocument/2006/relationships" xmlns:a="http://schemas.openxmlformats.org/drawingml/2006/main" r:embed="Re29be5fdca4244a3">
+          <a:blip xmlns:r="http://schemas.openxmlformats.org/officeDocument/2006/relationships" xmlns:a="http://schemas.openxmlformats.org/drawingml/2006/main" r:embed="Rd4dbc7170fdd41eb">
             <a:alphaModFix/>
           </a:blip>
           <a:srcRect xmlns:a="http://schemas.openxmlformats.org/drawingml/2006/main" l="0" t="0" r="0" b="0"/>
@@ -27815,19 +27965,19 @@
   </p:cSld>
   <p:clrMap bg1="lt1" tx1="dk1" bg2="dk2" tx2="lt2" accent1="accent1" accent2="accent2" accent3="accent3" accent4="accent4" accent5="accent5" accent6="accent6" hlink="hlink" folHlink="folHlink"/>
   <p:sldLayoutIdLst>
-    <p:sldLayoutId xmlns:r="http://schemas.openxmlformats.org/officeDocument/2006/relationships" id="2147483666" r:id="R60800709af9642ed"/>
-    <p:sldLayoutId xmlns:r="http://schemas.openxmlformats.org/officeDocument/2006/relationships" id="2147483667" r:id="Ra099b2701c1d4b18"/>
-    <p:sldLayoutId xmlns:r="http://schemas.openxmlformats.org/officeDocument/2006/relationships" id="2147483668" r:id="Rceda550d5f484367"/>
-    <p:sldLayoutId xmlns:r="http://schemas.openxmlformats.org/officeDocument/2006/relationships" id="2147483669" r:id="R9ad3660a23934564"/>
-    <p:sldLayoutId xmlns:r="http://schemas.openxmlformats.org/officeDocument/2006/relationships" id="2147483670" r:id="Re8ed57a620b84de5"/>
-    <p:sldLayoutId xmlns:r="http://schemas.openxmlformats.org/officeDocument/2006/relationships" id="2147483671" r:id="Rc849f8bb85ff4be1"/>
-    <p:sldLayoutId xmlns:r="http://schemas.openxmlformats.org/officeDocument/2006/relationships" id="2147483672" r:id="R48db7e87e5ad4020"/>
-    <p:sldLayoutId xmlns:r="http://schemas.openxmlformats.org/officeDocument/2006/relationships" id="2147483673" r:id="R40ad11aa2b1a4b82"/>
-    <p:sldLayoutId xmlns:r="http://schemas.openxmlformats.org/officeDocument/2006/relationships" id="2147483674" r:id="Rf891684204644031"/>
-    <p:sldLayoutId xmlns:r="http://schemas.openxmlformats.org/officeDocument/2006/relationships" id="2147483675" r:id="R32daf742e8de4dbc"/>
-    <p:sldLayoutId xmlns:r="http://schemas.openxmlformats.org/officeDocument/2006/relationships" id="2147483676" r:id="R60337ee202324e4e"/>
-    <p:sldLayoutId xmlns:r="http://schemas.openxmlformats.org/officeDocument/2006/relationships" id="2147483677" r:id="R92ddc615cf4a4f5c"/>
-    <p:sldLayoutId xmlns:r="http://schemas.openxmlformats.org/officeDocument/2006/relationships" id="2147483678" r:id="R53396600e9f64521"/>
+    <p:sldLayoutId xmlns:r="http://schemas.openxmlformats.org/officeDocument/2006/relationships" id="2147483666" r:id="R675dd2b4e0374c18"/>
+    <p:sldLayoutId xmlns:r="http://schemas.openxmlformats.org/officeDocument/2006/relationships" id="2147483667" r:id="R55d43037edb54a2e"/>
+    <p:sldLayoutId xmlns:r="http://schemas.openxmlformats.org/officeDocument/2006/relationships" id="2147483668" r:id="R86f3d2b7547e4455"/>
+    <p:sldLayoutId xmlns:r="http://schemas.openxmlformats.org/officeDocument/2006/relationships" id="2147483669" r:id="Rdbce2b4a41bc4654"/>
+    <p:sldLayoutId xmlns:r="http://schemas.openxmlformats.org/officeDocument/2006/relationships" id="2147483670" r:id="Red756d370e3e4389"/>
+    <p:sldLayoutId xmlns:r="http://schemas.openxmlformats.org/officeDocument/2006/relationships" id="2147483671" r:id="Rd0b1542b5ae64e49"/>
+    <p:sldLayoutId xmlns:r="http://schemas.openxmlformats.org/officeDocument/2006/relationships" id="2147483672" r:id="R0fe665cf018244cd"/>
+    <p:sldLayoutId xmlns:r="http://schemas.openxmlformats.org/officeDocument/2006/relationships" id="2147483673" r:id="Rec181f4d745f48e0"/>
+    <p:sldLayoutId xmlns:r="http://schemas.openxmlformats.org/officeDocument/2006/relationships" id="2147483674" r:id="R136e7bbb05bd4537"/>
+    <p:sldLayoutId xmlns:r="http://schemas.openxmlformats.org/officeDocument/2006/relationships" id="2147483675" r:id="R2bfec49b896b4b62"/>
+    <p:sldLayoutId xmlns:r="http://schemas.openxmlformats.org/officeDocument/2006/relationships" id="2147483676" r:id="Rf5f5edca603d4836"/>
+    <p:sldLayoutId xmlns:r="http://schemas.openxmlformats.org/officeDocument/2006/relationships" id="2147483677" r:id="R9cc5de3f1ddd495e"/>
+    <p:sldLayoutId xmlns:r="http://schemas.openxmlformats.org/officeDocument/2006/relationships" id="2147483678" r:id="R0866ea4be1024df4"/>
   </p:sldLayoutIdLst>
   <p:hf hdr="0" ftr="0" dt="0"/>
   <p:txStyles>
